--- a/epwgen.pptx
+++ b/epwgen.pptx
@@ -5,7 +5,7 @@
     <p:sldMasterId id="2147483648" r:id="rId1"/>
   </p:sldMasterIdLst>
   <p:notesMasterIdLst>
-    <p:notesMasterId r:id="rId10"/>
+    <p:notesMasterId r:id="rId11"/>
   </p:notesMasterIdLst>
   <p:sldIdLst>
     <p:sldId id="256" r:id="rId2"/>
@@ -15,7 +15,8 @@
     <p:sldId id="342" r:id="rId6"/>
     <p:sldId id="343" r:id="rId7"/>
     <p:sldId id="345" r:id="rId8"/>
-    <p:sldId id="346" r:id="rId9"/>
+    <p:sldId id="347" r:id="rId9"/>
+    <p:sldId id="346" r:id="rId10"/>
   </p:sldIdLst>
   <p:sldSz cx="9144000" cy="5143500" type="screen16x9"/>
   <p:notesSz cx="6858000" cy="9144000"/>
@@ -1065,6 +1066,90 @@
             <a:fld id="{AF285793-58F2-5D45-93FF-B0076DA99FD1}" type="slidenum">
               <a:rPr lang="en-US" smtClean="0"/>
               <a:t>8</a:t>
+            </a:fld>
+            <a:endParaRPr lang="en-US"/>
+          </a:p>
+        </p:txBody>
+      </p:sp>
+    </p:spTree>
+    <p:extLst>
+      <p:ext uri="{BB962C8B-B14F-4D97-AF65-F5344CB8AC3E}">
+        <p14:creationId xmlns:p14="http://schemas.microsoft.com/office/powerpoint/2010/main" val="2941235402"/>
+      </p:ext>
+    </p:extLst>
+  </p:cSld>
+  <p:clrMapOvr>
+    <a:masterClrMapping/>
+  </p:clrMapOvr>
+</p:notes>
+</file>
+
+<file path=ppt/notesSlides/notesSlide8.xml><?xml version="1.0" encoding="utf-8"?>
+<p:notes xmlns:a="http://schemas.openxmlformats.org/drawingml/2006/main" xmlns:r="http://schemas.openxmlformats.org/officeDocument/2006/relationships" xmlns:p="http://schemas.openxmlformats.org/presentationml/2006/main">
+  <p:cSld>
+    <p:spTree>
+      <p:nvGrpSpPr>
+        <p:cNvPr id="1" name=""/>
+        <p:cNvGrpSpPr/>
+        <p:nvPr/>
+      </p:nvGrpSpPr>
+      <p:grpSpPr>
+        <a:xfrm>
+          <a:off x="0" y="0"/>
+          <a:ext cx="0" cy="0"/>
+          <a:chOff x="0" y="0"/>
+          <a:chExt cx="0" cy="0"/>
+        </a:xfrm>
+      </p:grpSpPr>
+      <p:sp>
+        <p:nvSpPr>
+          <p:cNvPr id="2" name="Slide Image Placeholder 1"/>
+          <p:cNvSpPr>
+            <a:spLocks noGrp="1" noRot="1" noChangeAspect="1"/>
+          </p:cNvSpPr>
+          <p:nvPr>
+            <p:ph type="sldImg"/>
+          </p:nvPr>
+        </p:nvSpPr>
+        <p:spPr/>
+      </p:sp>
+      <p:sp>
+        <p:nvSpPr>
+          <p:cNvPr id="3" name="Notes Placeholder 2"/>
+          <p:cNvSpPr>
+            <a:spLocks noGrp="1"/>
+          </p:cNvSpPr>
+          <p:nvPr>
+            <p:ph type="body" idx="1"/>
+          </p:nvPr>
+        </p:nvSpPr>
+        <p:spPr/>
+        <p:txBody>
+          <a:bodyPr/>
+          <a:lstStyle/>
+          <a:p>
+            <a:endParaRPr lang="en-US" dirty="0"/>
+          </a:p>
+        </p:txBody>
+      </p:sp>
+      <p:sp>
+        <p:nvSpPr>
+          <p:cNvPr id="4" name="Slide Number Placeholder 3"/>
+          <p:cNvSpPr>
+            <a:spLocks noGrp="1"/>
+          </p:cNvSpPr>
+          <p:nvPr>
+            <p:ph type="sldNum" sz="quarter" idx="5"/>
+          </p:nvPr>
+        </p:nvSpPr>
+        <p:spPr/>
+        <p:txBody>
+          <a:bodyPr/>
+          <a:lstStyle/>
+          <a:p>
+            <a:fld id="{AF285793-58F2-5D45-93FF-B0076DA99FD1}" type="slidenum">
+              <a:rPr lang="en-US" smtClean="0"/>
+              <a:t>9</a:t>
             </a:fld>
             <a:endParaRPr lang="en-US"/>
           </a:p>
@@ -27422,8 +27507,8 @@
         </p:nvSpPr>
         <p:spPr>
           <a:xfrm>
-            <a:off x="457199" y="1118159"/>
-            <a:ext cx="4094962" cy="3242825"/>
+            <a:off x="457198" y="1118159"/>
+            <a:ext cx="4492795" cy="3242825"/>
           </a:xfrm>
         </p:spPr>
         <p:txBody>
@@ -27562,6 +27647,26 @@
               </a:rPr>
               <a:t>No documentation but great performances (SHOW EXAMPLES)</a:t>
             </a:r>
+          </a:p>
+          <a:p>
+            <a:pPr marL="457200" indent="-457200">
+              <a:buFont typeface="Arial" panose="020B0604020202020204" pitchFamily="34" charset="0"/>
+              <a:buChar char="•"/>
+            </a:pPr>
+            <a:r>
+              <a:rPr lang="en-US" b="0" dirty="0"/>
+              <a:t>~2700 locations rather than ~1200 </a:t>
+            </a:r>
+            <a:br>
+              <a:rPr lang="en-US" b="0" dirty="0"/>
+            </a:br>
+            <a:r>
+              <a:rPr lang="en-US" b="0" dirty="0"/>
+              <a:t>(SHOW MAP)</a:t>
+            </a:r>
+            <a:endParaRPr lang="en-US" b="0" dirty="0">
+              <a:effectLst/>
+            </a:endParaRPr>
           </a:p>
           <a:p>
             <a:pPr marL="457200" indent="-457200">
@@ -27582,9 +27687,8 @@
             </a:endParaRPr>
           </a:p>
           <a:p>
-            <a:pPr marL="1200150" lvl="1" indent="-457200">
-              <a:buFont typeface="Arial"/>
-              <a:buAutoNum type="arabicParenR"/>
+            <a:pPr lvl="1" indent="0">
+              <a:buNone/>
             </a:pPr>
             <a:endParaRPr lang="en-US" dirty="0">
               <a:effectLst/>
@@ -27645,8 +27749,8 @@
         </p:blipFill>
         <p:spPr>
           <a:xfrm>
-            <a:off x="4651204" y="941143"/>
-            <a:ext cx="4492796" cy="3926104"/>
+            <a:off x="4853770" y="1118159"/>
+            <a:ext cx="4290230" cy="3749088"/>
           </a:xfrm>
           <a:prstGeom prst="rect">
             <a:avLst/>
@@ -28067,6 +28171,154 @@
 </file>
 
 <file path=ppt/slides/slide8.xml><?xml version="1.0" encoding="utf-8"?>
+<p:sld xmlns:a="http://schemas.openxmlformats.org/drawingml/2006/main" xmlns:r="http://schemas.openxmlformats.org/officeDocument/2006/relationships" xmlns:p="http://schemas.openxmlformats.org/presentationml/2006/main">
+  <p:cSld>
+    <p:spTree>
+      <p:nvGrpSpPr>
+        <p:cNvPr id="1" name=""/>
+        <p:cNvGrpSpPr/>
+        <p:nvPr/>
+      </p:nvGrpSpPr>
+      <p:grpSpPr>
+        <a:xfrm>
+          <a:off x="0" y="0"/>
+          <a:ext cx="0" cy="0"/>
+          <a:chOff x="0" y="0"/>
+          <a:chExt cx="0" cy="0"/>
+        </a:xfrm>
+      </p:grpSpPr>
+      <p:sp>
+        <p:nvSpPr>
+          <p:cNvPr id="2" name="Title 1">
+            <a:extLst>
+              <a:ext uri="{FF2B5EF4-FFF2-40B4-BE49-F238E27FC236}">
+                <a16:creationId xmlns:a16="http://schemas.microsoft.com/office/drawing/2014/main" id="{941EA937-8FB4-D64B-A32F-8C8E9585D726}"/>
+              </a:ext>
+            </a:extLst>
+          </p:cNvPr>
+          <p:cNvSpPr>
+            <a:spLocks noGrp="1"/>
+          </p:cNvSpPr>
+          <p:nvPr>
+            <p:ph type="title"/>
+          </p:nvPr>
+        </p:nvSpPr>
+        <p:spPr/>
+        <p:txBody>
+          <a:bodyPr/>
+          <a:lstStyle/>
+          <a:p>
+            <a:r>
+              <a:rPr lang="en-US" dirty="0"/>
+              <a:t>To summarize:</a:t>
+            </a:r>
+          </a:p>
+        </p:txBody>
+      </p:sp>
+      <p:sp>
+        <p:nvSpPr>
+          <p:cNvPr id="3" name="Text Placeholder 2">
+            <a:extLst>
+              <a:ext uri="{FF2B5EF4-FFF2-40B4-BE49-F238E27FC236}">
+                <a16:creationId xmlns:a16="http://schemas.microsoft.com/office/drawing/2014/main" id="{BA218ECB-6ED6-074F-B055-16DB8DB3D2D4}"/>
+              </a:ext>
+            </a:extLst>
+          </p:cNvPr>
+          <p:cNvSpPr>
+            <a:spLocks noGrp="1"/>
+          </p:cNvSpPr>
+          <p:nvPr>
+            <p:ph type="body" sz="quarter" idx="10"/>
+          </p:nvPr>
+        </p:nvSpPr>
+        <p:spPr>
+          <a:xfrm>
+            <a:off x="457198" y="1118159"/>
+            <a:ext cx="4314995" cy="3789301"/>
+          </a:xfrm>
+        </p:spPr>
+        <p:txBody>
+          <a:bodyPr>
+            <a:normAutofit/>
+          </a:bodyPr>
+          <a:lstStyle/>
+          <a:p>
+            <a:pPr marL="457200" indent="-457200">
+              <a:buFont typeface="Arial" panose="020B0604020202020204" pitchFamily="34" charset="0"/>
+              <a:buChar char="•"/>
+            </a:pPr>
+            <a:r>
+              <a:rPr lang="en-US" b="0" dirty="0">
+                <a:effectLst/>
+              </a:rPr>
+              <a:t>More locations</a:t>
+            </a:r>
+          </a:p>
+          <a:p>
+            <a:pPr marL="457200" indent="-457200">
+              <a:buFont typeface="Arial" panose="020B0604020202020204" pitchFamily="34" charset="0"/>
+              <a:buChar char="•"/>
+            </a:pPr>
+            <a:endParaRPr lang="en-US" b="0" dirty="0">
+              <a:effectLst/>
+            </a:endParaRPr>
+          </a:p>
+          <a:p>
+            <a:pPr marL="1200150" lvl="1" indent="-457200">
+              <a:buFont typeface="Arial"/>
+              <a:buAutoNum type="arabicParenR"/>
+            </a:pPr>
+            <a:endParaRPr lang="en-US" dirty="0">
+              <a:effectLst/>
+            </a:endParaRPr>
+          </a:p>
+          <a:p>
+            <a:pPr marL="1200150" lvl="1" indent="-457200">
+              <a:buFont typeface="Arial"/>
+              <a:buAutoNum type="arabicParenR"/>
+            </a:pPr>
+            <a:endParaRPr lang="en-US" dirty="0">
+              <a:effectLst/>
+            </a:endParaRPr>
+          </a:p>
+          <a:p>
+            <a:pPr marL="1200150" lvl="1" indent="-457200">
+              <a:buAutoNum type="arabicParenR"/>
+            </a:pPr>
+            <a:endParaRPr lang="en-US" b="0" dirty="0"/>
+          </a:p>
+          <a:p>
+            <a:pPr marL="457200" indent="-457200">
+              <a:buAutoNum type="arabicParenR"/>
+            </a:pPr>
+            <a:endParaRPr lang="en-US" b="0" dirty="0"/>
+          </a:p>
+          <a:p>
+            <a:pPr marL="342900" indent="-342900">
+              <a:buFont typeface="Arial" panose="020B0604020202020204" pitchFamily="34" charset="0"/>
+              <a:buChar char="•"/>
+            </a:pPr>
+            <a:endParaRPr lang="en-US" b="0" dirty="0"/>
+          </a:p>
+          <a:p>
+            <a:endParaRPr lang="en-US" b="0" dirty="0"/>
+          </a:p>
+        </p:txBody>
+      </p:sp>
+    </p:spTree>
+    <p:extLst>
+      <p:ext uri="{BB962C8B-B14F-4D97-AF65-F5344CB8AC3E}">
+        <p14:creationId xmlns:p14="http://schemas.microsoft.com/office/powerpoint/2010/main" val="1214939520"/>
+      </p:ext>
+    </p:extLst>
+  </p:cSld>
+  <p:clrMapOvr>
+    <a:masterClrMapping/>
+  </p:clrMapOvr>
+</p:sld>
+</file>
+
+<file path=ppt/slides/slide9.xml><?xml version="1.0" encoding="utf-8"?>
 <p:sld xmlns:a="http://schemas.openxmlformats.org/drawingml/2006/main" xmlns:r="http://schemas.openxmlformats.org/officeDocument/2006/relationships" xmlns:p="http://schemas.openxmlformats.org/presentationml/2006/main">
   <p:cSld>
     <p:spTree>

--- a/epwgen.pptx
+++ b/epwgen.pptx
@@ -28149,14 +28149,545 @@
         </p:blipFill>
         <p:spPr>
           <a:xfrm>
-            <a:off x="2153438" y="1118159"/>
-            <a:ext cx="4435627" cy="3615238"/>
+            <a:off x="5674543" y="1561678"/>
+            <a:ext cx="3560857" cy="2902261"/>
           </a:xfrm>
           <a:prstGeom prst="rect">
             <a:avLst/>
           </a:prstGeom>
         </p:spPr>
       </p:pic>
+      <p:sp>
+        <p:nvSpPr>
+          <p:cNvPr id="6" name="TextBox 5">
+            <a:extLst>
+              <a:ext uri="{FF2B5EF4-FFF2-40B4-BE49-F238E27FC236}">
+                <a16:creationId xmlns:a16="http://schemas.microsoft.com/office/drawing/2014/main" id="{414BC100-C2B1-52CF-E9F9-78FF30902AAF}"/>
+              </a:ext>
+            </a:extLst>
+          </p:cNvPr>
+          <p:cNvSpPr txBox="1"/>
+          <p:nvPr/>
+        </p:nvSpPr>
+        <p:spPr>
+          <a:xfrm>
+            <a:off x="546476" y="1450054"/>
+            <a:ext cx="1525803" cy="1477328"/>
+          </a:xfrm>
+          <a:prstGeom prst="rect">
+            <a:avLst/>
+          </a:prstGeom>
+          <a:noFill/>
+          <a:ln>
+            <a:solidFill>
+              <a:schemeClr val="accent1"/>
+            </a:solidFill>
+          </a:ln>
+        </p:spPr>
+        <p:txBody>
+          <a:bodyPr wrap="square" rtlCol="0">
+            <a:spAutoFit/>
+          </a:bodyPr>
+          <a:lstStyle/>
+          <a:p>
+            <a:r>
+              <a:rPr lang="en-US" dirty="0"/>
+              <a:t>Input:</a:t>
+            </a:r>
+          </a:p>
+          <a:p>
+            <a:pPr marL="285750" indent="-285750">
+              <a:buFont typeface="Arial" panose="020B0604020202020204" pitchFamily="34" charset="0"/>
+              <a:buChar char="•"/>
+            </a:pPr>
+            <a:r>
+              <a:rPr lang="en-US" dirty="0"/>
+              <a:t>Latitude</a:t>
+            </a:r>
+          </a:p>
+          <a:p>
+            <a:pPr marL="285750" indent="-285750">
+              <a:buFont typeface="Arial" panose="020B0604020202020204" pitchFamily="34" charset="0"/>
+              <a:buChar char="•"/>
+            </a:pPr>
+            <a:r>
+              <a:rPr lang="en-US" dirty="0"/>
+              <a:t>Longitude</a:t>
+            </a:r>
+          </a:p>
+          <a:p>
+            <a:pPr marL="285750" indent="-285750">
+              <a:buFont typeface="Arial" panose="020B0604020202020204" pitchFamily="34" charset="0"/>
+              <a:buChar char="•"/>
+            </a:pPr>
+            <a:r>
+              <a:rPr lang="en-US" dirty="0"/>
+              <a:t>Year</a:t>
+            </a:r>
+          </a:p>
+          <a:p>
+            <a:pPr marL="285750" indent="-285750">
+              <a:buFont typeface="Arial" panose="020B0604020202020204" pitchFamily="34" charset="0"/>
+              <a:buChar char="•"/>
+            </a:pPr>
+            <a:r>
+              <a:rPr lang="en-US" dirty="0"/>
+              <a:t>Name</a:t>
+            </a:r>
+          </a:p>
+        </p:txBody>
+      </p:sp>
+      <p:cxnSp>
+        <p:nvCxnSpPr>
+          <p:cNvPr id="8" name="Straight Arrow Connector 7">
+            <a:extLst>
+              <a:ext uri="{FF2B5EF4-FFF2-40B4-BE49-F238E27FC236}">
+                <a16:creationId xmlns:a16="http://schemas.microsoft.com/office/drawing/2014/main" id="{2FED1DBD-882C-B984-2BED-473DFE4C6ABD}"/>
+              </a:ext>
+            </a:extLst>
+          </p:cNvPr>
+          <p:cNvCxnSpPr>
+            <a:cxnSpLocks/>
+            <a:stCxn id="6" idx="3"/>
+            <a:endCxn id="13" idx="1"/>
+          </p:cNvCxnSpPr>
+          <p:nvPr/>
+        </p:nvCxnSpPr>
+        <p:spPr>
+          <a:xfrm flipV="1">
+            <a:off x="2072279" y="1579824"/>
+            <a:ext cx="555496" cy="608894"/>
+          </a:xfrm>
+          <a:prstGeom prst="straightConnector1">
+            <a:avLst/>
+          </a:prstGeom>
+          <a:ln>
+            <a:tailEnd type="triangle"/>
+          </a:ln>
+        </p:spPr>
+        <p:style>
+          <a:lnRef idx="2">
+            <a:schemeClr val="accent1"/>
+          </a:lnRef>
+          <a:fillRef idx="0">
+            <a:schemeClr val="accent1"/>
+          </a:fillRef>
+          <a:effectRef idx="1">
+            <a:schemeClr val="accent1"/>
+          </a:effectRef>
+          <a:fontRef idx="minor">
+            <a:schemeClr val="tx1"/>
+          </a:fontRef>
+        </p:style>
+      </p:cxnSp>
+      <p:sp>
+        <p:nvSpPr>
+          <p:cNvPr id="9" name="TextBox 8">
+            <a:extLst>
+              <a:ext uri="{FF2B5EF4-FFF2-40B4-BE49-F238E27FC236}">
+                <a16:creationId xmlns:a16="http://schemas.microsoft.com/office/drawing/2014/main" id="{A9682608-3A0F-E7DD-2690-23E32ECE04A6}"/>
+              </a:ext>
+            </a:extLst>
+          </p:cNvPr>
+          <p:cNvSpPr txBox="1"/>
+          <p:nvPr/>
+        </p:nvSpPr>
+        <p:spPr>
+          <a:xfrm>
+            <a:off x="2627774" y="3419678"/>
+            <a:ext cx="2927157" cy="369332"/>
+          </a:xfrm>
+          <a:prstGeom prst="rect">
+            <a:avLst/>
+          </a:prstGeom>
+          <a:noFill/>
+          <a:ln>
+            <a:solidFill>
+              <a:schemeClr val="accent1"/>
+            </a:solidFill>
+          </a:ln>
+        </p:spPr>
+        <p:txBody>
+          <a:bodyPr wrap="square" rtlCol="0">
+            <a:spAutoFit/>
+          </a:bodyPr>
+          <a:lstStyle/>
+          <a:p>
+            <a:r>
+              <a:rPr lang="en-US" dirty="0"/>
+              <a:t>3) Splice the two </a:t>
+            </a:r>
+            <a:r>
+              <a:rPr lang="en-US" dirty="0" err="1"/>
+              <a:t>daframes</a:t>
+            </a:r>
+            <a:endParaRPr lang="en-US" dirty="0"/>
+          </a:p>
+        </p:txBody>
+      </p:sp>
+      <p:sp>
+        <p:nvSpPr>
+          <p:cNvPr id="13" name="TextBox 12">
+            <a:extLst>
+              <a:ext uri="{FF2B5EF4-FFF2-40B4-BE49-F238E27FC236}">
+                <a16:creationId xmlns:a16="http://schemas.microsoft.com/office/drawing/2014/main" id="{97BFDEDC-A081-82E4-77FC-1B8DCE2B3B85}"/>
+              </a:ext>
+            </a:extLst>
+          </p:cNvPr>
+          <p:cNvSpPr txBox="1"/>
+          <p:nvPr/>
+        </p:nvSpPr>
+        <p:spPr>
+          <a:xfrm>
+            <a:off x="2627775" y="1118159"/>
+            <a:ext cx="2927157" cy="923330"/>
+          </a:xfrm>
+          <a:prstGeom prst="rect">
+            <a:avLst/>
+          </a:prstGeom>
+          <a:noFill/>
+          <a:ln>
+            <a:solidFill>
+              <a:schemeClr val="accent1"/>
+            </a:solidFill>
+          </a:ln>
+        </p:spPr>
+        <p:txBody>
+          <a:bodyPr wrap="square" rtlCol="0">
+            <a:spAutoFit/>
+          </a:bodyPr>
+          <a:lstStyle/>
+          <a:p>
+            <a:r>
+              <a:rPr lang="en-US" dirty="0"/>
+              <a:t>1) Find the closest </a:t>
+            </a:r>
+            <a:r>
+              <a:rPr lang="en-US" dirty="0" err="1"/>
+              <a:t>Meteostat</a:t>
+            </a:r>
+            <a:endParaRPr lang="en-US" dirty="0"/>
+          </a:p>
+          <a:p>
+            <a:r>
+              <a:rPr lang="en-US" dirty="0"/>
+              <a:t>location with less than 3h gap within 100mi.</a:t>
+            </a:r>
+          </a:p>
+        </p:txBody>
+      </p:sp>
+      <p:cxnSp>
+        <p:nvCxnSpPr>
+          <p:cNvPr id="17" name="Straight Arrow Connector 16">
+            <a:extLst>
+              <a:ext uri="{FF2B5EF4-FFF2-40B4-BE49-F238E27FC236}">
+                <a16:creationId xmlns:a16="http://schemas.microsoft.com/office/drawing/2014/main" id="{CEA27677-515E-BE8E-B7DB-31FAEBD04889}"/>
+              </a:ext>
+            </a:extLst>
+          </p:cNvPr>
+          <p:cNvCxnSpPr>
+            <a:cxnSpLocks/>
+            <a:stCxn id="13" idx="2"/>
+            <a:endCxn id="21" idx="0"/>
+          </p:cNvCxnSpPr>
+          <p:nvPr/>
+        </p:nvCxnSpPr>
+        <p:spPr>
+          <a:xfrm flipH="1">
+            <a:off x="4091353" y="2041489"/>
+            <a:ext cx="1" cy="222753"/>
+          </a:xfrm>
+          <a:prstGeom prst="straightConnector1">
+            <a:avLst/>
+          </a:prstGeom>
+          <a:ln>
+            <a:tailEnd type="triangle"/>
+          </a:ln>
+        </p:spPr>
+        <p:style>
+          <a:lnRef idx="2">
+            <a:schemeClr val="accent1"/>
+          </a:lnRef>
+          <a:fillRef idx="0">
+            <a:schemeClr val="accent1"/>
+          </a:fillRef>
+          <a:effectRef idx="1">
+            <a:schemeClr val="accent1"/>
+          </a:effectRef>
+          <a:fontRef idx="minor">
+            <a:schemeClr val="tx1"/>
+          </a:fontRef>
+        </p:style>
+      </p:cxnSp>
+      <p:sp>
+        <p:nvSpPr>
+          <p:cNvPr id="21" name="TextBox 20">
+            <a:extLst>
+              <a:ext uri="{FF2B5EF4-FFF2-40B4-BE49-F238E27FC236}">
+                <a16:creationId xmlns:a16="http://schemas.microsoft.com/office/drawing/2014/main" id="{CB796CDF-F4AD-5038-6D99-32324E41A74F}"/>
+              </a:ext>
+            </a:extLst>
+          </p:cNvPr>
+          <p:cNvSpPr txBox="1"/>
+          <p:nvPr/>
+        </p:nvSpPr>
+        <p:spPr>
+          <a:xfrm>
+            <a:off x="2627774" y="2264242"/>
+            <a:ext cx="2927157" cy="923330"/>
+          </a:xfrm>
+          <a:prstGeom prst="rect">
+            <a:avLst/>
+          </a:prstGeom>
+          <a:noFill/>
+          <a:ln>
+            <a:solidFill>
+              <a:schemeClr val="accent1"/>
+            </a:solidFill>
+          </a:ln>
+        </p:spPr>
+        <p:txBody>
+          <a:bodyPr wrap="square" rtlCol="0">
+            <a:spAutoFit/>
+          </a:bodyPr>
+          <a:lstStyle/>
+          <a:p>
+            <a:r>
+              <a:rPr lang="en-US" dirty="0"/>
+              <a:t>2) Gather the EPW for the selected station coordinates from MERRA2</a:t>
+            </a:r>
+          </a:p>
+        </p:txBody>
+      </p:sp>
+      <p:cxnSp>
+        <p:nvCxnSpPr>
+          <p:cNvPr id="27" name="Straight Arrow Connector 26">
+            <a:extLst>
+              <a:ext uri="{FF2B5EF4-FFF2-40B4-BE49-F238E27FC236}">
+                <a16:creationId xmlns:a16="http://schemas.microsoft.com/office/drawing/2014/main" id="{6BE4CF5F-0FA6-64E6-4083-E7748A985F11}"/>
+              </a:ext>
+            </a:extLst>
+          </p:cNvPr>
+          <p:cNvCxnSpPr>
+            <a:cxnSpLocks/>
+            <a:stCxn id="21" idx="2"/>
+            <a:endCxn id="9" idx="0"/>
+          </p:cNvCxnSpPr>
+          <p:nvPr/>
+        </p:nvCxnSpPr>
+        <p:spPr>
+          <a:xfrm>
+            <a:off x="4091353" y="3187572"/>
+            <a:ext cx="0" cy="232106"/>
+          </a:xfrm>
+          <a:prstGeom prst="straightConnector1">
+            <a:avLst/>
+          </a:prstGeom>
+          <a:ln>
+            <a:tailEnd type="triangle"/>
+          </a:ln>
+        </p:spPr>
+        <p:style>
+          <a:lnRef idx="2">
+            <a:schemeClr val="accent1"/>
+          </a:lnRef>
+          <a:fillRef idx="0">
+            <a:schemeClr val="accent1"/>
+          </a:fillRef>
+          <a:effectRef idx="1">
+            <a:schemeClr val="accent1"/>
+          </a:effectRef>
+          <a:fontRef idx="minor">
+            <a:schemeClr val="tx1"/>
+          </a:fontRef>
+        </p:style>
+      </p:cxnSp>
+      <p:sp>
+        <p:nvSpPr>
+          <p:cNvPr id="36" name="TextBox 35">
+            <a:extLst>
+              <a:ext uri="{FF2B5EF4-FFF2-40B4-BE49-F238E27FC236}">
+                <a16:creationId xmlns:a16="http://schemas.microsoft.com/office/drawing/2014/main" id="{C2AE773D-AAB8-7AF0-B078-97127AF3036A}"/>
+              </a:ext>
+            </a:extLst>
+          </p:cNvPr>
+          <p:cNvSpPr txBox="1"/>
+          <p:nvPr/>
+        </p:nvSpPr>
+        <p:spPr>
+          <a:xfrm>
+            <a:off x="2627774" y="4021116"/>
+            <a:ext cx="2927157" cy="923330"/>
+          </a:xfrm>
+          <a:prstGeom prst="rect">
+            <a:avLst/>
+          </a:prstGeom>
+          <a:noFill/>
+          <a:ln>
+            <a:solidFill>
+              <a:schemeClr val="accent1"/>
+            </a:solidFill>
+          </a:ln>
+        </p:spPr>
+        <p:txBody>
+          <a:bodyPr wrap="square" rtlCol="0">
+            <a:spAutoFit/>
+          </a:bodyPr>
+          <a:lstStyle/>
+          <a:p>
+            <a:r>
+              <a:rPr lang="en-US" dirty="0"/>
+              <a:t>4) Insert the header with design conditions and other customized information</a:t>
+            </a:r>
+          </a:p>
+        </p:txBody>
+      </p:sp>
+      <p:cxnSp>
+        <p:nvCxnSpPr>
+          <p:cNvPr id="37" name="Straight Arrow Connector 36">
+            <a:extLst>
+              <a:ext uri="{FF2B5EF4-FFF2-40B4-BE49-F238E27FC236}">
+                <a16:creationId xmlns:a16="http://schemas.microsoft.com/office/drawing/2014/main" id="{951CE1F1-B70C-346D-A828-E37BA3E8B00E}"/>
+              </a:ext>
+            </a:extLst>
+          </p:cNvPr>
+          <p:cNvCxnSpPr>
+            <a:cxnSpLocks/>
+            <a:stCxn id="9" idx="2"/>
+            <a:endCxn id="36" idx="0"/>
+          </p:cNvCxnSpPr>
+          <p:nvPr/>
+        </p:nvCxnSpPr>
+        <p:spPr>
+          <a:xfrm>
+            <a:off x="4091353" y="3789010"/>
+            <a:ext cx="0" cy="232106"/>
+          </a:xfrm>
+          <a:prstGeom prst="straightConnector1">
+            <a:avLst/>
+          </a:prstGeom>
+          <a:ln>
+            <a:tailEnd type="triangle"/>
+          </a:ln>
+        </p:spPr>
+        <p:style>
+          <a:lnRef idx="2">
+            <a:schemeClr val="accent1"/>
+          </a:lnRef>
+          <a:fillRef idx="0">
+            <a:schemeClr val="accent1"/>
+          </a:fillRef>
+          <a:effectRef idx="1">
+            <a:schemeClr val="accent1"/>
+          </a:effectRef>
+          <a:fontRef idx="minor">
+            <a:schemeClr val="tx1"/>
+          </a:fontRef>
+        </p:style>
+      </p:cxnSp>
+      <p:sp>
+        <p:nvSpPr>
+          <p:cNvPr id="44" name="TextBox 43">
+            <a:extLst>
+              <a:ext uri="{FF2B5EF4-FFF2-40B4-BE49-F238E27FC236}">
+                <a16:creationId xmlns:a16="http://schemas.microsoft.com/office/drawing/2014/main" id="{1AFCB497-6BC0-64C7-4F86-7B33C7D7A78A}"/>
+              </a:ext>
+            </a:extLst>
+          </p:cNvPr>
+          <p:cNvSpPr txBox="1"/>
+          <p:nvPr/>
+        </p:nvSpPr>
+        <p:spPr>
+          <a:xfrm>
+            <a:off x="248892" y="3419678"/>
+            <a:ext cx="1942420" cy="1477328"/>
+          </a:xfrm>
+          <a:prstGeom prst="rect">
+            <a:avLst/>
+          </a:prstGeom>
+          <a:noFill/>
+          <a:ln>
+            <a:solidFill>
+              <a:schemeClr val="accent1"/>
+            </a:solidFill>
+          </a:ln>
+        </p:spPr>
+        <p:txBody>
+          <a:bodyPr wrap="square" rtlCol="0">
+            <a:spAutoFit/>
+          </a:bodyPr>
+          <a:lstStyle/>
+          <a:p>
+            <a:r>
+              <a:rPr lang="en-US" dirty="0"/>
+              <a:t>Save EPW file and print out:</a:t>
+            </a:r>
+          </a:p>
+          <a:p>
+            <a:pPr marL="285750" indent="-285750">
+              <a:buFont typeface="Arial" panose="020B0604020202020204" pitchFamily="34" charset="0"/>
+              <a:buChar char="•"/>
+            </a:pPr>
+            <a:r>
+              <a:rPr lang="en-US" dirty="0"/>
+              <a:t>Station distance</a:t>
+            </a:r>
+          </a:p>
+          <a:p>
+            <a:pPr marL="285750" indent="-285750">
+              <a:buFont typeface="Arial" panose="020B0604020202020204" pitchFamily="34" charset="0"/>
+              <a:buChar char="•"/>
+            </a:pPr>
+            <a:r>
+              <a:rPr lang="en-US" dirty="0"/>
+              <a:t>HDD/CDD</a:t>
+            </a:r>
+          </a:p>
+        </p:txBody>
+      </p:sp>
+      <p:cxnSp>
+        <p:nvCxnSpPr>
+          <p:cNvPr id="45" name="Straight Arrow Connector 44">
+            <a:extLst>
+              <a:ext uri="{FF2B5EF4-FFF2-40B4-BE49-F238E27FC236}">
+                <a16:creationId xmlns:a16="http://schemas.microsoft.com/office/drawing/2014/main" id="{713658AD-A818-BFC6-3555-FB7E43106EE5}"/>
+              </a:ext>
+            </a:extLst>
+          </p:cNvPr>
+          <p:cNvCxnSpPr>
+            <a:cxnSpLocks/>
+            <a:stCxn id="36" idx="1"/>
+            <a:endCxn id="44" idx="3"/>
+          </p:cNvCxnSpPr>
+          <p:nvPr/>
+        </p:nvCxnSpPr>
+        <p:spPr>
+          <a:xfrm flipH="1" flipV="1">
+            <a:off x="2191312" y="4158342"/>
+            <a:ext cx="436462" cy="324439"/>
+          </a:xfrm>
+          <a:prstGeom prst="straightConnector1">
+            <a:avLst/>
+          </a:prstGeom>
+          <a:ln>
+            <a:tailEnd type="triangle"/>
+          </a:ln>
+        </p:spPr>
+        <p:style>
+          <a:lnRef idx="2">
+            <a:schemeClr val="accent1"/>
+          </a:lnRef>
+          <a:fillRef idx="0">
+            <a:schemeClr val="accent1"/>
+          </a:fillRef>
+          <a:effectRef idx="1">
+            <a:schemeClr val="accent1"/>
+          </a:effectRef>
+          <a:fontRef idx="minor">
+            <a:schemeClr val="tx1"/>
+          </a:fontRef>
+        </p:style>
+      </p:cxnSp>
     </p:spTree>
     <p:extLst>
       <p:ext uri="{BB962C8B-B14F-4D97-AF65-F5344CB8AC3E}">
@@ -28259,6 +28790,63 @@
               <a:buFont typeface="Arial" panose="020B0604020202020204" pitchFamily="34" charset="0"/>
               <a:buChar char="•"/>
             </a:pPr>
+            <a:r>
+              <a:rPr lang="en-US" b="0" dirty="0"/>
+              <a:t>Quality check taken care</a:t>
+            </a:r>
+          </a:p>
+          <a:p>
+            <a:pPr marL="457200" indent="-457200">
+              <a:buFont typeface="Arial" panose="020B0604020202020204" pitchFamily="34" charset="0"/>
+              <a:buChar char="•"/>
+            </a:pPr>
+            <a:r>
+              <a:rPr lang="en-US" b="0" dirty="0">
+                <a:effectLst/>
+              </a:rPr>
+              <a:t>All the variables in the EPW filled with measured or modeled data</a:t>
+            </a:r>
+          </a:p>
+          <a:p>
+            <a:pPr marL="457200" indent="-457200">
+              <a:buFont typeface="Arial" panose="020B0604020202020204" pitchFamily="34" charset="0"/>
+              <a:buChar char="•"/>
+            </a:pPr>
+            <a:r>
+              <a:rPr lang="en-US" b="0" dirty="0"/>
+              <a:t>Data available for the last completed year</a:t>
+            </a:r>
+          </a:p>
+          <a:p>
+            <a:pPr marL="457200" indent="-457200">
+              <a:buFont typeface="Arial" panose="020B0604020202020204" pitchFamily="34" charset="0"/>
+              <a:buChar char="•"/>
+            </a:pPr>
+            <a:r>
+              <a:rPr lang="en-US" b="0" dirty="0">
+                <a:effectLst/>
+              </a:rPr>
+              <a:t>Data available everywhere</a:t>
+            </a:r>
+          </a:p>
+          <a:p>
+            <a:pPr marL="457200" indent="-457200">
+              <a:buFont typeface="Arial" panose="020B0604020202020204" pitchFamily="34" charset="0"/>
+              <a:buChar char="•"/>
+            </a:pPr>
+            <a:r>
+              <a:rPr lang="en-US" b="0" dirty="0"/>
+              <a:t>2021 design Conditions</a:t>
+            </a:r>
+            <a:endParaRPr lang="en-US" b="0" dirty="0">
+              <a:effectLst/>
+            </a:endParaRPr>
+          </a:p>
+          <a:p>
+            <a:pPr marL="457200" indent="-457200">
+              <a:buFont typeface="Arial" panose="020B0604020202020204" pitchFamily="34" charset="0"/>
+              <a:buChar char="•"/>
+            </a:pPr>
             <a:endParaRPr lang="en-US" b="0" dirty="0">
               <a:effectLst/>
             </a:endParaRPr>
@@ -28465,7 +29053,7 @@
         <p:spPr>
           <a:xfrm>
             <a:off x="670921" y="1163290"/>
-            <a:ext cx="6579351" cy="2308324"/>
+            <a:ext cx="6579351" cy="2585323"/>
           </a:xfrm>
           <a:prstGeom prst="rect">
             <a:avLst/>
@@ -28530,6 +29118,16 @@
             <a:r>
               <a:rPr lang="en-US" dirty="0"/>
               <a:t>Create STAT file and/or DDYs</a:t>
+            </a:r>
+          </a:p>
+          <a:p>
+            <a:pPr marL="285750" indent="-285750">
+              <a:buFont typeface="Arial" panose="020B0604020202020204" pitchFamily="34" charset="0"/>
+              <a:buChar char="•"/>
+            </a:pPr>
+            <a:r>
+              <a:rPr lang="en-US" dirty="0"/>
+              <a:t>Allow use of 2013 design conditions</a:t>
             </a:r>
           </a:p>
           <a:p>

--- a/epwgen.pptx
+++ b/epwgen.pptx
@@ -5,18 +5,19 @@
     <p:sldMasterId id="2147483648" r:id="rId1"/>
   </p:sldMasterIdLst>
   <p:notesMasterIdLst>
-    <p:notesMasterId r:id="rId11"/>
+    <p:notesMasterId r:id="rId12"/>
   </p:notesMasterIdLst>
   <p:sldIdLst>
     <p:sldId id="256" r:id="rId2"/>
     <p:sldId id="327" r:id="rId3"/>
-    <p:sldId id="339" r:id="rId4"/>
-    <p:sldId id="337" r:id="rId5"/>
-    <p:sldId id="342" r:id="rId6"/>
-    <p:sldId id="343" r:id="rId7"/>
-    <p:sldId id="345" r:id="rId8"/>
-    <p:sldId id="347" r:id="rId9"/>
-    <p:sldId id="346" r:id="rId10"/>
+    <p:sldId id="348" r:id="rId4"/>
+    <p:sldId id="339" r:id="rId5"/>
+    <p:sldId id="337" r:id="rId6"/>
+    <p:sldId id="342" r:id="rId7"/>
+    <p:sldId id="343" r:id="rId8"/>
+    <p:sldId id="345" r:id="rId9"/>
+    <p:sldId id="347" r:id="rId10"/>
+    <p:sldId id="346" r:id="rId11"/>
   </p:sldIdLst>
   <p:sldSz cx="9144000" cy="5143500" type="screen16x9"/>
   <p:notesSz cx="6858000" cy="9144000"/>
@@ -230,7 +231,7 @@
           </a:lstStyle>
           <a:p>
             <a:fld id="{9D67FED6-1CE0-9E49-8E28-4BC1AFD39CD7}" type="datetimeFigureOut">
-              <a:t>9/11/24</a:t>
+              <a:t>10/1/24</a:t>
             </a:fld>
             <a:endParaRPr lang="en-US"/>
           </a:p>
@@ -729,7 +730,7 @@
           <a:p>
             <a:fld id="{AF285793-58F2-5D45-93FF-B0076DA99FD1}" type="slidenum">
               <a:rPr lang="en-US" smtClean="0"/>
-              <a:t>3</a:t>
+              <a:t>4</a:t>
             </a:fld>
             <a:endParaRPr lang="en-US"/>
           </a:p>
@@ -813,7 +814,7 @@
           <a:p>
             <a:fld id="{AF285793-58F2-5D45-93FF-B0076DA99FD1}" type="slidenum">
               <a:rPr lang="en-US" smtClean="0"/>
-              <a:t>5</a:t>
+              <a:t>6</a:t>
             </a:fld>
             <a:endParaRPr lang="en-US"/>
           </a:p>
@@ -897,7 +898,7 @@
           <a:p>
             <a:fld id="{AF285793-58F2-5D45-93FF-B0076DA99FD1}" type="slidenum">
               <a:rPr lang="en-US" smtClean="0"/>
-              <a:t>6</a:t>
+              <a:t>7</a:t>
             </a:fld>
             <a:endParaRPr lang="en-US"/>
           </a:p>
@@ -981,7 +982,7 @@
           <a:p>
             <a:fld id="{AF285793-58F2-5D45-93FF-B0076DA99FD1}" type="slidenum">
               <a:rPr lang="en-US" smtClean="0"/>
-              <a:t>7</a:t>
+              <a:t>8</a:t>
             </a:fld>
             <a:endParaRPr lang="en-US"/>
           </a:p>
@@ -1065,7 +1066,7 @@
           <a:p>
             <a:fld id="{AF285793-58F2-5D45-93FF-B0076DA99FD1}" type="slidenum">
               <a:rPr lang="en-US" smtClean="0"/>
-              <a:t>8</a:t>
+              <a:t>9</a:t>
             </a:fld>
             <a:endParaRPr lang="en-US"/>
           </a:p>
@@ -1149,7 +1150,7 @@
           <a:p>
             <a:fld id="{AF285793-58F2-5D45-93FF-B0076DA99FD1}" type="slidenum">
               <a:rPr lang="en-US" smtClean="0"/>
-              <a:t>9</a:t>
+              <a:t>10</a:t>
             </a:fld>
             <a:endParaRPr lang="en-US"/>
           </a:p>
@@ -25124,7 +25125,7 @@
           <a:p>
             <a:fld id="{FD72C916-A1AF-4DFB-8AC4-CAE881AE17CD}" type="datetimeFigureOut">
               <a:rPr lang="en-US" smtClean="0"/>
-              <a:t>9/11/24</a:t>
+              <a:t>10/1/24</a:t>
             </a:fld>
             <a:endParaRPr lang="en-US"/>
           </a:p>
@@ -26766,6 +26767,264 @@
 </p:sld>
 </file>
 
+<file path=ppt/slides/slide10.xml><?xml version="1.0" encoding="utf-8"?>
+<p:sld xmlns:a="http://schemas.openxmlformats.org/drawingml/2006/main" xmlns:r="http://schemas.openxmlformats.org/officeDocument/2006/relationships" xmlns:p="http://schemas.openxmlformats.org/presentationml/2006/main">
+  <p:cSld>
+    <p:spTree>
+      <p:nvGrpSpPr>
+        <p:cNvPr id="1" name=""/>
+        <p:cNvGrpSpPr/>
+        <p:nvPr/>
+      </p:nvGrpSpPr>
+      <p:grpSpPr>
+        <a:xfrm>
+          <a:off x="0" y="0"/>
+          <a:ext cx="0" cy="0"/>
+          <a:chOff x="0" y="0"/>
+          <a:chExt cx="0" cy="0"/>
+        </a:xfrm>
+      </p:grpSpPr>
+      <p:sp>
+        <p:nvSpPr>
+          <p:cNvPr id="2" name="Title 1">
+            <a:extLst>
+              <a:ext uri="{FF2B5EF4-FFF2-40B4-BE49-F238E27FC236}">
+                <a16:creationId xmlns:a16="http://schemas.microsoft.com/office/drawing/2014/main" id="{941EA937-8FB4-D64B-A32F-8C8E9585D726}"/>
+              </a:ext>
+            </a:extLst>
+          </p:cNvPr>
+          <p:cNvSpPr>
+            <a:spLocks noGrp="1"/>
+          </p:cNvSpPr>
+          <p:nvPr>
+            <p:ph type="title"/>
+          </p:nvPr>
+        </p:nvSpPr>
+        <p:spPr/>
+        <p:txBody>
+          <a:bodyPr/>
+          <a:lstStyle/>
+          <a:p>
+            <a:r>
+              <a:rPr lang="en-US" dirty="0"/>
+              <a:t>Future editions/ideas</a:t>
+            </a:r>
+          </a:p>
+        </p:txBody>
+      </p:sp>
+      <p:sp>
+        <p:nvSpPr>
+          <p:cNvPr id="3" name="Text Placeholder 2">
+            <a:extLst>
+              <a:ext uri="{FF2B5EF4-FFF2-40B4-BE49-F238E27FC236}">
+                <a16:creationId xmlns:a16="http://schemas.microsoft.com/office/drawing/2014/main" id="{BA218ECB-6ED6-074F-B055-16DB8DB3D2D4}"/>
+              </a:ext>
+            </a:extLst>
+          </p:cNvPr>
+          <p:cNvSpPr>
+            <a:spLocks noGrp="1"/>
+          </p:cNvSpPr>
+          <p:nvPr>
+            <p:ph type="body" sz="quarter" idx="10"/>
+          </p:nvPr>
+        </p:nvSpPr>
+        <p:spPr>
+          <a:xfrm>
+            <a:off x="457198" y="1118159"/>
+            <a:ext cx="4314995" cy="3789301"/>
+          </a:xfrm>
+        </p:spPr>
+        <p:txBody>
+          <a:bodyPr>
+            <a:normAutofit/>
+          </a:bodyPr>
+          <a:lstStyle/>
+          <a:p>
+            <a:pPr marL="457200" indent="-457200">
+              <a:buFont typeface="Arial" panose="020B0604020202020204" pitchFamily="34" charset="0"/>
+              <a:buChar char="•"/>
+            </a:pPr>
+            <a:endParaRPr lang="en-US" b="0" dirty="0">
+              <a:effectLst/>
+            </a:endParaRPr>
+          </a:p>
+          <a:p>
+            <a:pPr marL="457200" indent="-457200">
+              <a:buFont typeface="Arial" panose="020B0604020202020204" pitchFamily="34" charset="0"/>
+              <a:buChar char="•"/>
+            </a:pPr>
+            <a:endParaRPr lang="en-US" b="0" dirty="0">
+              <a:effectLst/>
+            </a:endParaRPr>
+          </a:p>
+          <a:p>
+            <a:pPr marL="1200150" lvl="1" indent="-457200">
+              <a:buFont typeface="Arial"/>
+              <a:buAutoNum type="arabicParenR"/>
+            </a:pPr>
+            <a:endParaRPr lang="en-US" dirty="0">
+              <a:effectLst/>
+            </a:endParaRPr>
+          </a:p>
+          <a:p>
+            <a:pPr marL="1200150" lvl="1" indent="-457200">
+              <a:buFont typeface="Arial"/>
+              <a:buAutoNum type="arabicParenR"/>
+            </a:pPr>
+            <a:endParaRPr lang="en-US" dirty="0">
+              <a:effectLst/>
+            </a:endParaRPr>
+          </a:p>
+          <a:p>
+            <a:pPr marL="1200150" lvl="1" indent="-457200">
+              <a:buAutoNum type="arabicParenR"/>
+            </a:pPr>
+            <a:endParaRPr lang="en-US" b="0" dirty="0"/>
+          </a:p>
+          <a:p>
+            <a:pPr marL="457200" indent="-457200">
+              <a:buAutoNum type="arabicParenR"/>
+            </a:pPr>
+            <a:endParaRPr lang="en-US" b="0" dirty="0"/>
+          </a:p>
+          <a:p>
+            <a:pPr marL="342900" indent="-342900">
+              <a:buFont typeface="Arial" panose="020B0604020202020204" pitchFamily="34" charset="0"/>
+              <a:buChar char="•"/>
+            </a:pPr>
+            <a:endParaRPr lang="en-US" b="0" dirty="0"/>
+          </a:p>
+          <a:p>
+            <a:endParaRPr lang="en-US" b="0" dirty="0"/>
+          </a:p>
+        </p:txBody>
+      </p:sp>
+      <p:sp>
+        <p:nvSpPr>
+          <p:cNvPr id="4" name="TextBox 3">
+            <a:extLst>
+              <a:ext uri="{FF2B5EF4-FFF2-40B4-BE49-F238E27FC236}">
+                <a16:creationId xmlns:a16="http://schemas.microsoft.com/office/drawing/2014/main" id="{6B53BE6D-0D8C-1ABB-0B37-63088F68B435}"/>
+              </a:ext>
+            </a:extLst>
+          </p:cNvPr>
+          <p:cNvSpPr txBox="1"/>
+          <p:nvPr/>
+        </p:nvSpPr>
+        <p:spPr>
+          <a:xfrm>
+            <a:off x="670921" y="1163290"/>
+            <a:ext cx="6579351" cy="2585323"/>
+          </a:xfrm>
+          <a:prstGeom prst="rect">
+            <a:avLst/>
+          </a:prstGeom>
+          <a:noFill/>
+        </p:spPr>
+        <p:txBody>
+          <a:bodyPr wrap="square" rtlCol="0">
+            <a:spAutoFit/>
+          </a:bodyPr>
+          <a:lstStyle/>
+          <a:p>
+            <a:pPr marL="285750" indent="-285750">
+              <a:buFont typeface="Arial" panose="020B0604020202020204" pitchFamily="34" charset="0"/>
+              <a:buChar char="•"/>
+            </a:pPr>
+            <a:r>
+              <a:rPr lang="en-US" dirty="0"/>
+              <a:t>Integrate TMY/</a:t>
+            </a:r>
+            <a:r>
+              <a:rPr lang="en-US" dirty="0" err="1"/>
+              <a:t>GaTMY</a:t>
+            </a:r>
+            <a:endParaRPr lang="en-US" dirty="0"/>
+          </a:p>
+          <a:p>
+            <a:pPr marL="285750" indent="-285750">
+              <a:buFont typeface="Arial" panose="020B0604020202020204" pitchFamily="34" charset="0"/>
+              <a:buChar char="•"/>
+            </a:pPr>
+            <a:r>
+              <a:rPr lang="en-US" dirty="0"/>
+              <a:t>Provide the option to use ERA5 vs MERRA2</a:t>
+            </a:r>
+          </a:p>
+          <a:p>
+            <a:pPr marL="285750" indent="-285750">
+              <a:buFont typeface="Arial" panose="020B0604020202020204" pitchFamily="34" charset="0"/>
+              <a:buChar char="•"/>
+            </a:pPr>
+            <a:r>
+              <a:rPr lang="en-US" dirty="0"/>
+              <a:t>Use MERRA2 directly</a:t>
+            </a:r>
+          </a:p>
+          <a:p>
+            <a:pPr marL="285750" indent="-285750">
+              <a:buFont typeface="Arial" panose="020B0604020202020204" pitchFamily="34" charset="0"/>
+              <a:buChar char="•"/>
+            </a:pPr>
+            <a:r>
+              <a:rPr lang="en-US" dirty="0"/>
+              <a:t>Plot data or provide statistics</a:t>
+            </a:r>
+          </a:p>
+          <a:p>
+            <a:pPr marL="285750" indent="-285750">
+              <a:buFont typeface="Arial" panose="020B0604020202020204" pitchFamily="34" charset="0"/>
+              <a:buChar char="•"/>
+            </a:pPr>
+            <a:r>
+              <a:rPr lang="en-US" dirty="0"/>
+              <a:t>Create STAT file and/or DDYs</a:t>
+            </a:r>
+          </a:p>
+          <a:p>
+            <a:pPr marL="285750" indent="-285750">
+              <a:buFont typeface="Arial" panose="020B0604020202020204" pitchFamily="34" charset="0"/>
+              <a:buChar char="•"/>
+            </a:pPr>
+            <a:r>
+              <a:rPr lang="en-US" dirty="0"/>
+              <a:t>Allow use of 2013 design conditions</a:t>
+            </a:r>
+          </a:p>
+          <a:p>
+            <a:pPr marL="285750" indent="-285750">
+              <a:buFont typeface="Arial" panose="020B0604020202020204" pitchFamily="34" charset="0"/>
+              <a:buChar char="•"/>
+            </a:pPr>
+            <a:r>
+              <a:rPr lang="en-US" dirty="0"/>
+              <a:t>Let the user search by FIP code or ZIP code or something else</a:t>
+            </a:r>
+          </a:p>
+          <a:p>
+            <a:br>
+              <a:rPr lang="en-US" dirty="0"/>
+            </a:br>
+            <a:r>
+              <a:rPr lang="en-US" dirty="0"/>
+              <a:t>Anything else?</a:t>
+            </a:r>
+          </a:p>
+        </p:txBody>
+      </p:sp>
+    </p:spTree>
+    <p:extLst>
+      <p:ext uri="{BB962C8B-B14F-4D97-AF65-F5344CB8AC3E}">
+        <p14:creationId xmlns:p14="http://schemas.microsoft.com/office/powerpoint/2010/main" val="702805414"/>
+      </p:ext>
+    </p:extLst>
+  </p:cSld>
+  <p:clrMapOvr>
+    <a:masterClrMapping/>
+  </p:clrMapOvr>
+</p:sld>
+</file>
+
 <file path=ppt/slides/slide2.xml><?xml version="1.0" encoding="utf-8"?>
 <p:sld xmlns:a="http://schemas.openxmlformats.org/drawingml/2006/main" xmlns:r="http://schemas.openxmlformats.org/officeDocument/2006/relationships" xmlns:p="http://schemas.openxmlformats.org/presentationml/2006/main">
   <p:cSld>
@@ -26975,7 +27234,7 @@
           <p:cNvPr id="2" name="Title 1">
             <a:extLst>
               <a:ext uri="{FF2B5EF4-FFF2-40B4-BE49-F238E27FC236}">
-                <a16:creationId xmlns:a16="http://schemas.microsoft.com/office/drawing/2014/main" id="{941EA937-8FB4-D64B-A32F-8C8E9585D726}"/>
+                <a16:creationId xmlns:a16="http://schemas.microsoft.com/office/drawing/2014/main" id="{CC3BAC93-208D-D34B-5F99-B787171B05D5}"/>
               </a:ext>
             </a:extLst>
           </p:cNvPr>
@@ -26992,23 +27251,49 @@
           <a:lstStyle/>
           <a:p>
             <a:r>
-              <a:rPr lang="en-US" dirty="0"/>
-              <a:t>Solution: </a:t>
-            </a:r>
-            <a:r>
               <a:rPr lang="en-US" dirty="0" err="1"/>
-              <a:t>EPWgen</a:t>
+              <a:t>diyepw</a:t>
             </a:r>
             <a:endParaRPr lang="en-US" dirty="0"/>
           </a:p>
         </p:txBody>
       </p:sp>
-      <p:sp>
-        <p:nvSpPr>
-          <p:cNvPr id="3" name="Text Placeholder 2">
+      <p:pic>
+        <p:nvPicPr>
+          <p:cNvPr id="10" name="Picture 9" descr="A screenshot of a document&#10;&#10;Description automatically generated">
             <a:extLst>
               <a:ext uri="{FF2B5EF4-FFF2-40B4-BE49-F238E27FC236}">
-                <a16:creationId xmlns:a16="http://schemas.microsoft.com/office/drawing/2014/main" id="{BA218ECB-6ED6-074F-B055-16DB8DB3D2D4}"/>
+                <a16:creationId xmlns:a16="http://schemas.microsoft.com/office/drawing/2014/main" id="{4A08438E-9B93-28AD-F48F-7369429BC938}"/>
+              </a:ext>
+            </a:extLst>
+          </p:cNvPr>
+          <p:cNvPicPr>
+            <a:picLocks noChangeAspect="1"/>
+          </p:cNvPicPr>
+          <p:nvPr/>
+        </p:nvPicPr>
+        <p:blipFill>
+          <a:blip r:embed="rId2"/>
+          <a:stretch>
+            <a:fillRect/>
+          </a:stretch>
+        </p:blipFill>
+        <p:spPr>
+          <a:xfrm>
+            <a:off x="4463787" y="635730"/>
+            <a:ext cx="4749444" cy="4507769"/>
+          </a:xfrm>
+          <a:prstGeom prst="rect">
+            <a:avLst/>
+          </a:prstGeom>
+        </p:spPr>
+      </p:pic>
+      <p:sp>
+        <p:nvSpPr>
+          <p:cNvPr id="11" name="Text Placeholder 2">
+            <a:extLst>
+              <a:ext uri="{FF2B5EF4-FFF2-40B4-BE49-F238E27FC236}">
+                <a16:creationId xmlns:a16="http://schemas.microsoft.com/office/drawing/2014/main" id="{2BBFDE29-89B4-960E-0488-F261A6166613}"/>
               </a:ext>
             </a:extLst>
           </p:cNvPr>
@@ -27021,8 +27306,8 @@
         </p:nvSpPr>
         <p:spPr>
           <a:xfrm>
-            <a:off x="731340" y="1480673"/>
-            <a:ext cx="4057086" cy="2279729"/>
+            <a:off x="152400" y="1116619"/>
+            <a:ext cx="4311387" cy="3644851"/>
           </a:xfrm>
         </p:spPr>
         <p:txBody>
@@ -27031,29 +27316,43 @@
           </a:bodyPr>
           <a:lstStyle/>
           <a:p>
-            <a:pPr marL="457200" indent="-457200">
-              <a:buAutoNum type="arabicParenR"/>
+            <a:pPr marL="342900" indent="-342900">
+              <a:buFont typeface="Arial" panose="020B0604020202020204" pitchFamily="34" charset="0"/>
+              <a:buChar char="•"/>
             </a:pPr>
             <a:r>
               <a:rPr lang="en-US" b="0" dirty="0"/>
-              <a:t>Switched from NSRDB to MERRA2</a:t>
-            </a:r>
-          </a:p>
-          <a:p>
-            <a:endParaRPr lang="en-US" b="0" dirty="0"/>
-          </a:p>
-          <a:p>
+              <a:t>Violates physics/psychrometry (TMY+AMY)</a:t>
+            </a:r>
+          </a:p>
+          <a:p>
+            <a:pPr marL="342900" indent="-342900">
+              <a:buFont typeface="Arial" panose="020B0604020202020204" pitchFamily="34" charset="0"/>
+              <a:buChar char="•"/>
+            </a:pPr>
             <a:r>
               <a:rPr lang="en-US" b="0" dirty="0"/>
-              <a:t>2) Using </a:t>
-            </a:r>
-            <a:r>
-              <a:rPr lang="en-US" b="0" dirty="0" err="1"/>
-              <a:t>Meteostat</a:t>
-            </a:r>
+              <a:t>Quality control is minor or inexistent</a:t>
+            </a:r>
+          </a:p>
+          <a:p>
+            <a:pPr marL="342900" indent="-342900">
+              <a:buFont typeface="Arial" panose="020B0604020202020204" pitchFamily="34" charset="0"/>
+              <a:buChar char="•"/>
+            </a:pPr>
             <a:r>
               <a:rPr lang="en-US" b="0" dirty="0"/>
-              <a:t> to download data</a:t>
+              <a:t>No RH</a:t>
+            </a:r>
+          </a:p>
+          <a:p>
+            <a:pPr marL="342900" indent="-342900">
+              <a:buFont typeface="Arial" panose="020B0604020202020204" pitchFamily="34" charset="0"/>
+              <a:buChar char="•"/>
+            </a:pPr>
+            <a:r>
+              <a:rPr lang="en-US" b="0" dirty="0"/>
+              <a:t>Few data sources</a:t>
             </a:r>
           </a:p>
           <a:p>
@@ -27068,39 +27367,10 @@
           </a:p>
         </p:txBody>
       </p:sp>
-      <p:pic>
-        <p:nvPicPr>
-          <p:cNvPr id="5" name="Picture 4" descr="A screenshot of a computer&#10;&#10;Description automatically generated">
-            <a:extLst>
-              <a:ext uri="{FF2B5EF4-FFF2-40B4-BE49-F238E27FC236}">
-                <a16:creationId xmlns:a16="http://schemas.microsoft.com/office/drawing/2014/main" id="{641A8809-BD93-D57A-C3BB-6B47D3FF0B5F}"/>
-              </a:ext>
-            </a:extLst>
-          </p:cNvPr>
-          <p:cNvPicPr>
-            <a:picLocks noChangeAspect="1"/>
-          </p:cNvPicPr>
-          <p:nvPr/>
-        </p:nvPicPr>
-        <p:blipFill>
-          <a:blip r:embed="rId3"/>
-          <a:srcRect t="1163"/>
-          <a:stretch/>
-        </p:blipFill>
-        <p:spPr>
-          <a:xfrm>
-            <a:off x="4571999" y="1010869"/>
-            <a:ext cx="4435627" cy="3615238"/>
-          </a:xfrm>
-          <a:prstGeom prst="rect">
-            <a:avLst/>
-          </a:prstGeom>
-        </p:spPr>
-      </p:pic>
     </p:spTree>
     <p:extLst>
       <p:ext uri="{BB962C8B-B14F-4D97-AF65-F5344CB8AC3E}">
-        <p14:creationId xmlns:p14="http://schemas.microsoft.com/office/powerpoint/2010/main" val="745521740"/>
+        <p14:creationId xmlns:p14="http://schemas.microsoft.com/office/powerpoint/2010/main" val="1301113464"/>
       </p:ext>
     </p:extLst>
   </p:cSld>
@@ -27132,7 +27402,7 @@
           <p:cNvPr id="2" name="Title 1">
             <a:extLst>
               <a:ext uri="{FF2B5EF4-FFF2-40B4-BE49-F238E27FC236}">
-                <a16:creationId xmlns:a16="http://schemas.microsoft.com/office/drawing/2014/main" id="{882ABBA0-C01B-C3E4-49E0-5BAC66FFE06A}"/>
+                <a16:creationId xmlns:a16="http://schemas.microsoft.com/office/drawing/2014/main" id="{941EA937-8FB4-D64B-A32F-8C8E9585D726}"/>
               </a:ext>
             </a:extLst>
           </p:cNvPr>
@@ -27150,17 +27420,87 @@
           <a:p>
             <a:r>
               <a:rPr lang="en-US" dirty="0"/>
-              <a:t>MERRA2</a:t>
-            </a:r>
+              <a:t>Solution: </a:t>
+            </a:r>
+            <a:r>
+              <a:rPr lang="en-US" dirty="0" err="1"/>
+              <a:t>EPWgen</a:t>
+            </a:r>
+            <a:endParaRPr lang="en-US" dirty="0"/>
+          </a:p>
+        </p:txBody>
+      </p:sp>
+      <p:sp>
+        <p:nvSpPr>
+          <p:cNvPr id="3" name="Text Placeholder 2">
+            <a:extLst>
+              <a:ext uri="{FF2B5EF4-FFF2-40B4-BE49-F238E27FC236}">
+                <a16:creationId xmlns:a16="http://schemas.microsoft.com/office/drawing/2014/main" id="{BA218ECB-6ED6-074F-B055-16DB8DB3D2D4}"/>
+              </a:ext>
+            </a:extLst>
+          </p:cNvPr>
+          <p:cNvSpPr>
+            <a:spLocks noGrp="1"/>
+          </p:cNvSpPr>
+          <p:nvPr>
+            <p:ph type="body" sz="quarter" idx="10"/>
+          </p:nvPr>
+        </p:nvSpPr>
+        <p:spPr>
+          <a:xfrm>
+            <a:off x="731340" y="1480673"/>
+            <a:ext cx="4057086" cy="2279729"/>
+          </a:xfrm>
+        </p:spPr>
+        <p:txBody>
+          <a:bodyPr>
+            <a:normAutofit/>
+          </a:bodyPr>
+          <a:lstStyle/>
+          <a:p>
+            <a:pPr marL="457200" indent="-457200">
+              <a:buAutoNum type="arabicParenR"/>
+            </a:pPr>
+            <a:r>
+              <a:rPr lang="en-US" b="0" dirty="0"/>
+              <a:t>Switched from NSRDB to MERRA2</a:t>
+            </a:r>
+          </a:p>
+          <a:p>
+            <a:endParaRPr lang="en-US" b="0" dirty="0"/>
+          </a:p>
+          <a:p>
+            <a:r>
+              <a:rPr lang="en-US" b="0" dirty="0"/>
+              <a:t>2) Using </a:t>
+            </a:r>
+            <a:r>
+              <a:rPr lang="en-US" b="0" dirty="0" err="1"/>
+              <a:t>Meteostat</a:t>
+            </a:r>
+            <a:r>
+              <a:rPr lang="en-US" b="0" dirty="0"/>
+              <a:t> to download data</a:t>
+            </a:r>
+          </a:p>
+          <a:p>
+            <a:pPr marL="342900" indent="-342900">
+              <a:buFont typeface="Arial" panose="020B0604020202020204" pitchFamily="34" charset="0"/>
+              <a:buChar char="•"/>
+            </a:pPr>
+            <a:endParaRPr lang="en-US" b="0" dirty="0"/>
+          </a:p>
+          <a:p>
+            <a:endParaRPr lang="en-US" b="0" dirty="0"/>
           </a:p>
         </p:txBody>
       </p:sp>
       <p:pic>
         <p:nvPicPr>
-          <p:cNvPr id="4" name="Picture 3" descr="A map of the north and south america&#10;&#10;Description automatically generated">
+          <p:cNvPr id="5" name="Picture 4" descr="A screenshot of a computer&#10;&#10;Description automatically generated">
             <a:extLst>
               <a:ext uri="{FF2B5EF4-FFF2-40B4-BE49-F238E27FC236}">
-                <a16:creationId xmlns:a16="http://schemas.microsoft.com/office/drawing/2014/main" id="{1DF149CF-BCB1-191C-6A9E-B0C0C9D7438A}"/>
+                <a16:creationId xmlns:a16="http://schemas.microsoft.com/office/drawing/2014/main" id="{641A8809-BD93-D57A-C3BB-6B47D3FF0B5F}"/>
               </a:ext>
             </a:extLst>
           </p:cNvPr>
@@ -27170,270 +27510,24 @@
           <p:nvPr/>
         </p:nvPicPr>
         <p:blipFill>
-          <a:blip r:embed="rId2"/>
-          <a:stretch>
-            <a:fillRect/>
-          </a:stretch>
+          <a:blip r:embed="rId3"/>
+          <a:srcRect t="1163"/>
+          <a:stretch/>
         </p:blipFill>
         <p:spPr>
           <a:xfrm>
-            <a:off x="4208388" y="1070095"/>
-            <a:ext cx="4935612" cy="3516108"/>
+            <a:off x="4571999" y="1010869"/>
+            <a:ext cx="4435627" cy="3615238"/>
           </a:xfrm>
           <a:prstGeom prst="rect">
             <a:avLst/>
           </a:prstGeom>
         </p:spPr>
       </p:pic>
-      <p:sp>
-        <p:nvSpPr>
-          <p:cNvPr id="5" name="TextBox 4">
-            <a:extLst>
-              <a:ext uri="{FF2B5EF4-FFF2-40B4-BE49-F238E27FC236}">
-                <a16:creationId xmlns:a16="http://schemas.microsoft.com/office/drawing/2014/main" id="{3316F872-E403-FB6C-BD76-F4DB903B6743}"/>
-              </a:ext>
-            </a:extLst>
-          </p:cNvPr>
-          <p:cNvSpPr txBox="1"/>
-          <p:nvPr/>
-        </p:nvSpPr>
-        <p:spPr>
-          <a:xfrm>
-            <a:off x="457199" y="1260682"/>
-            <a:ext cx="3579147" cy="3139321"/>
-          </a:xfrm>
-          <a:prstGeom prst="rect">
-            <a:avLst/>
-          </a:prstGeom>
-          <a:noFill/>
-        </p:spPr>
-        <p:txBody>
-          <a:bodyPr wrap="square" rtlCol="0">
-            <a:spAutoFit/>
-          </a:bodyPr>
-          <a:lstStyle/>
-          <a:p>
-            <a:pPr marL="285750" indent="-285750">
-              <a:buFont typeface="Arial" panose="020B0604020202020204" pitchFamily="34" charset="0"/>
-              <a:buChar char="•"/>
-            </a:pPr>
-            <a:r>
-              <a:rPr lang="en-US" dirty="0"/>
-              <a:t>Upscaling from 4x4km to 50x50km cells, BUT:</a:t>
-            </a:r>
-          </a:p>
-          <a:p>
-            <a:pPr marL="800100" lvl="1" indent="-342900">
-              <a:buFont typeface="+mj-lt"/>
-              <a:buAutoNum type="arabicPeriod"/>
-            </a:pPr>
-            <a:r>
-              <a:rPr lang="en-US" dirty="0"/>
-              <a:t>Data available everywhere in the world (yes, also AK)</a:t>
-            </a:r>
-          </a:p>
-          <a:p>
-            <a:pPr marL="800100" lvl="1" indent="-342900">
-              <a:buFont typeface="+mj-lt"/>
-              <a:buAutoNum type="arabicPeriod"/>
-            </a:pPr>
-            <a:r>
-              <a:rPr lang="en-US" dirty="0"/>
-              <a:t>Data available almost real-time</a:t>
-            </a:r>
-          </a:p>
-          <a:p>
-            <a:pPr marL="342900" indent="-342900">
-              <a:buFont typeface="Arial" panose="020B0604020202020204" pitchFamily="34" charset="0"/>
-              <a:buChar char="•"/>
-            </a:pPr>
-            <a:r>
-              <a:rPr lang="en-US" dirty="0"/>
-              <a:t>MERRA-2 provides full EPWs. </a:t>
-            </a:r>
-            <a:br>
-              <a:rPr lang="en-US" dirty="0"/>
-            </a:br>
-            <a:r>
-              <a:rPr lang="en-US" dirty="0" err="1"/>
-              <a:t>EPWgen</a:t>
-            </a:r>
-            <a:r>
-              <a:rPr lang="en-US" dirty="0"/>
-              <a:t> uses that as a backbone and swaps in:</a:t>
-            </a:r>
-          </a:p>
-          <a:p>
-            <a:pPr marL="742950" lvl="1" indent="-285750">
-              <a:buFont typeface="Arial" panose="020B0604020202020204" pitchFamily="34" charset="0"/>
-              <a:buChar char="•"/>
-            </a:pPr>
-            <a:endParaRPr lang="en-US" dirty="0"/>
-          </a:p>
-          <a:p>
-            <a:pPr marL="285750" indent="-285750">
-              <a:buFont typeface="Arial" panose="020B0604020202020204" pitchFamily="34" charset="0"/>
-              <a:buChar char="•"/>
-            </a:pPr>
-            <a:endParaRPr lang="en-US" dirty="0"/>
-          </a:p>
-        </p:txBody>
-      </p:sp>
-      <p:sp>
-        <p:nvSpPr>
-          <p:cNvPr id="6" name="TextBox 5">
-            <a:extLst>
-              <a:ext uri="{FF2B5EF4-FFF2-40B4-BE49-F238E27FC236}">
-                <a16:creationId xmlns:a16="http://schemas.microsoft.com/office/drawing/2014/main" id="{E0E663DC-1AEB-0319-AEA0-5811A2B692C9}"/>
-              </a:ext>
-            </a:extLst>
-          </p:cNvPr>
-          <p:cNvSpPr txBox="1"/>
-          <p:nvPr/>
-        </p:nvSpPr>
-        <p:spPr>
-          <a:xfrm>
-            <a:off x="853276" y="3817890"/>
-            <a:ext cx="2982876" cy="2031325"/>
-          </a:xfrm>
-          <a:prstGeom prst="rect">
-            <a:avLst/>
-          </a:prstGeom>
-          <a:noFill/>
-        </p:spPr>
-        <p:txBody>
-          <a:bodyPr wrap="square" numCol="2" rtlCol="0">
-            <a:spAutoFit/>
-          </a:bodyPr>
-          <a:lstStyle/>
-          <a:p>
-            <a:pPr marL="800100" lvl="1" indent="-342900">
-              <a:buFont typeface="Arial" panose="020B0604020202020204" pitchFamily="34" charset="0"/>
-              <a:buChar char="•"/>
-            </a:pPr>
-            <a:r>
-              <a:rPr lang="en-US" sz="1400" dirty="0" err="1"/>
-              <a:t>Tdb</a:t>
-            </a:r>
-            <a:endParaRPr lang="en-US" sz="1400" dirty="0"/>
-          </a:p>
-          <a:p>
-            <a:pPr marL="800100" lvl="1" indent="-342900">
-              <a:buFont typeface="Arial" panose="020B0604020202020204" pitchFamily="34" charset="0"/>
-              <a:buChar char="•"/>
-            </a:pPr>
-            <a:r>
-              <a:rPr lang="en-US" sz="1400" dirty="0" err="1"/>
-              <a:t>Tdew</a:t>
-            </a:r>
-            <a:endParaRPr lang="en-US" sz="1400" dirty="0"/>
-          </a:p>
-          <a:p>
-            <a:pPr marL="800100" lvl="1" indent="-342900">
-              <a:buFont typeface="Arial" panose="020B0604020202020204" pitchFamily="34" charset="0"/>
-              <a:buChar char="•"/>
-            </a:pPr>
-            <a:r>
-              <a:rPr lang="en-US" sz="1400" dirty="0"/>
-              <a:t>RH</a:t>
-            </a:r>
-          </a:p>
-          <a:p>
-            <a:pPr marL="800100" lvl="1" indent="-342900">
-              <a:buFont typeface="Arial" panose="020B0604020202020204" pitchFamily="34" charset="0"/>
-              <a:buChar char="•"/>
-            </a:pPr>
-            <a:r>
-              <a:rPr lang="en-US" sz="1400" dirty="0"/>
-              <a:t>P</a:t>
-            </a:r>
-          </a:p>
-          <a:p>
-            <a:pPr marL="800100" lvl="1" indent="-342900">
-              <a:buFont typeface="Arial" panose="020B0604020202020204" pitchFamily="34" charset="0"/>
-              <a:buChar char="•"/>
-            </a:pPr>
-            <a:endParaRPr lang="en-US" sz="1400" dirty="0"/>
-          </a:p>
-          <a:p>
-            <a:pPr marL="800100" lvl="1" indent="-342900">
-              <a:buFont typeface="Arial" panose="020B0604020202020204" pitchFamily="34" charset="0"/>
-              <a:buChar char="•"/>
-            </a:pPr>
-            <a:endParaRPr lang="en-US" sz="1400" dirty="0"/>
-          </a:p>
-          <a:p>
-            <a:pPr marL="800100" lvl="1" indent="-342900">
-              <a:buFont typeface="Arial" panose="020B0604020202020204" pitchFamily="34" charset="0"/>
-              <a:buChar char="•"/>
-            </a:pPr>
-            <a:endParaRPr lang="en-US" sz="1400" dirty="0"/>
-          </a:p>
-          <a:p>
-            <a:pPr marL="800100" lvl="1" indent="-342900">
-              <a:buFont typeface="Arial" panose="020B0604020202020204" pitchFamily="34" charset="0"/>
-              <a:buChar char="•"/>
-            </a:pPr>
-            <a:endParaRPr lang="en-US" sz="1400" dirty="0"/>
-          </a:p>
-          <a:p>
-            <a:pPr marL="800100" lvl="1" indent="-342900">
-              <a:buFont typeface="Arial" panose="020B0604020202020204" pitchFamily="34" charset="0"/>
-              <a:buChar char="•"/>
-            </a:pPr>
-            <a:endParaRPr lang="en-US" sz="1400" dirty="0"/>
-          </a:p>
-          <a:p>
-            <a:pPr marL="800100" lvl="1" indent="-342900">
-              <a:buFont typeface="Arial" panose="020B0604020202020204" pitchFamily="34" charset="0"/>
-              <a:buChar char="•"/>
-            </a:pPr>
-            <a:r>
-              <a:rPr lang="en-US" sz="1400" dirty="0" err="1"/>
-              <a:t>Wdir</a:t>
-            </a:r>
-            <a:endParaRPr lang="en-US" sz="1400" dirty="0"/>
-          </a:p>
-          <a:p>
-            <a:pPr marL="800100" lvl="1" indent="-342900">
-              <a:buFont typeface="Arial" panose="020B0604020202020204" pitchFamily="34" charset="0"/>
-              <a:buChar char="•"/>
-            </a:pPr>
-            <a:r>
-              <a:rPr lang="en-US" sz="1400" dirty="0" err="1"/>
-              <a:t>Wspeed</a:t>
-            </a:r>
-            <a:endParaRPr lang="en-US" sz="1400" dirty="0"/>
-          </a:p>
-          <a:p>
-            <a:pPr marL="800100" lvl="1" indent="-342900">
-              <a:buFont typeface="Arial" panose="020B0604020202020204" pitchFamily="34" charset="0"/>
-              <a:buChar char="•"/>
-            </a:pPr>
-            <a:r>
-              <a:rPr lang="en-US" sz="1400" dirty="0"/>
-              <a:t>Rain</a:t>
-            </a:r>
-          </a:p>
-          <a:p>
-            <a:pPr marL="800100" lvl="1" indent="-342900">
-              <a:buFont typeface="Arial" panose="020B0604020202020204" pitchFamily="34" charset="0"/>
-              <a:buChar char="•"/>
-            </a:pPr>
-            <a:r>
-              <a:rPr lang="en-US" sz="1400" dirty="0"/>
-              <a:t>Snow </a:t>
-            </a:r>
-          </a:p>
-          <a:p>
-            <a:endParaRPr lang="en-US" dirty="0"/>
-          </a:p>
-        </p:txBody>
-      </p:sp>
     </p:spTree>
     <p:extLst>
       <p:ext uri="{BB962C8B-B14F-4D97-AF65-F5344CB8AC3E}">
-        <p14:creationId xmlns:p14="http://schemas.microsoft.com/office/powerpoint/2010/main" val="2434670469"/>
+        <p14:creationId xmlns:p14="http://schemas.microsoft.com/office/powerpoint/2010/main" val="745521740"/>
       </p:ext>
     </p:extLst>
   </p:cSld>
@@ -27465,7 +27559,7 @@
           <p:cNvPr id="2" name="Title 1">
             <a:extLst>
               <a:ext uri="{FF2B5EF4-FFF2-40B4-BE49-F238E27FC236}">
-                <a16:creationId xmlns:a16="http://schemas.microsoft.com/office/drawing/2014/main" id="{941EA937-8FB4-D64B-A32F-8C8E9585D726}"/>
+                <a16:creationId xmlns:a16="http://schemas.microsoft.com/office/drawing/2014/main" id="{882ABBA0-C01B-C3E4-49E0-5BAC66FFE06A}"/>
               </a:ext>
             </a:extLst>
           </p:cNvPr>
@@ -27482,257 +27576,18 @@
           <a:lstStyle/>
           <a:p>
             <a:r>
-              <a:rPr lang="en-US" dirty="0" err="1"/>
-              <a:t>Meteostat</a:t>
-            </a:r>
-            <a:endParaRPr lang="en-US" dirty="0"/>
-          </a:p>
-        </p:txBody>
-      </p:sp>
-      <p:sp>
-        <p:nvSpPr>
-          <p:cNvPr id="3" name="Text Placeholder 2">
+              <a:rPr lang="en-US" dirty="0"/>
+              <a:t>MERRA2</a:t>
+            </a:r>
+          </a:p>
+        </p:txBody>
+      </p:sp>
+      <p:pic>
+        <p:nvPicPr>
+          <p:cNvPr id="4" name="Picture 3" descr="A map of the north and south america&#10;&#10;Description automatically generated">
             <a:extLst>
               <a:ext uri="{FF2B5EF4-FFF2-40B4-BE49-F238E27FC236}">
-                <a16:creationId xmlns:a16="http://schemas.microsoft.com/office/drawing/2014/main" id="{BA218ECB-6ED6-074F-B055-16DB8DB3D2D4}"/>
-              </a:ext>
-            </a:extLst>
-          </p:cNvPr>
-          <p:cNvSpPr>
-            <a:spLocks noGrp="1"/>
-          </p:cNvSpPr>
-          <p:nvPr>
-            <p:ph type="body" sz="quarter" idx="10"/>
-          </p:nvPr>
-        </p:nvSpPr>
-        <p:spPr>
-          <a:xfrm>
-            <a:off x="457198" y="1118159"/>
-            <a:ext cx="4492795" cy="3242825"/>
-          </a:xfrm>
-        </p:spPr>
-        <p:txBody>
-          <a:bodyPr>
-            <a:normAutofit fontScale="70000" lnSpcReduction="20000"/>
-          </a:bodyPr>
-          <a:lstStyle/>
-          <a:p>
-            <a:pPr marL="457200" indent="-457200">
-              <a:buFont typeface="Arial" panose="020B0604020202020204" pitchFamily="34" charset="0"/>
-              <a:buChar char="•"/>
-            </a:pPr>
-            <a:r>
-              <a:rPr lang="en-US" b="0" dirty="0"/>
-              <a:t>Free open library </a:t>
-            </a:r>
-            <a:r>
-              <a:rPr lang="en-US" b="0" dirty="0">
-                <a:hlinkClick r:id="rId3"/>
-              </a:rPr>
-              <a:t>https://dev.meteostat.net/</a:t>
-            </a:r>
-            <a:endParaRPr lang="en-US" b="0" dirty="0"/>
-          </a:p>
-          <a:p>
-            <a:pPr marL="457200" indent="-457200">
-              <a:buFont typeface="Arial" panose="020B0604020202020204" pitchFamily="34" charset="0"/>
-              <a:buChar char="•"/>
-            </a:pPr>
-            <a:r>
-              <a:rPr lang="en-US" b="0" dirty="0"/>
-              <a:t>Real-time data</a:t>
-            </a:r>
-          </a:p>
-          <a:p>
-            <a:pPr marL="457200" indent="-457200">
-              <a:buFont typeface="Arial" panose="020B0604020202020204" pitchFamily="34" charset="0"/>
-              <a:buChar char="•"/>
-            </a:pPr>
-            <a:r>
-              <a:rPr lang="en-US" b="0" dirty="0"/>
-              <a:t>Data Sources:</a:t>
-            </a:r>
-          </a:p>
-          <a:p>
-            <a:pPr marL="1200150" lvl="1" indent="-457200">
-              <a:buFont typeface="Arial"/>
-              <a:buAutoNum type="arabicParenR"/>
-            </a:pPr>
-            <a:r>
-              <a:rPr lang="en-US" dirty="0">
-                <a:effectLst/>
-              </a:rPr>
-              <a:t>National weather service</a:t>
-            </a:r>
-          </a:p>
-          <a:p>
-            <a:pPr marL="1200150" lvl="1" indent="-457200">
-              <a:buFont typeface="Arial"/>
-              <a:buAutoNum type="arabicParenR"/>
-            </a:pPr>
-            <a:r>
-              <a:rPr lang="en-US" dirty="0">
-                <a:effectLst/>
-              </a:rPr>
-              <a:t>Global dataset (ISD)</a:t>
-            </a:r>
-          </a:p>
-          <a:p>
-            <a:pPr marL="1200150" lvl="1" indent="-457200">
-              <a:buFont typeface="Arial"/>
-              <a:buAutoNum type="arabicParenR"/>
-            </a:pPr>
-            <a:r>
-              <a:rPr lang="en-US" dirty="0">
-                <a:effectLst/>
-              </a:rPr>
-              <a:t>SYNOP reports</a:t>
-            </a:r>
-          </a:p>
-          <a:p>
-            <a:pPr marL="1200150" lvl="1" indent="-457200">
-              <a:buFont typeface="Arial"/>
-              <a:buAutoNum type="arabicParenR"/>
-            </a:pPr>
-            <a:r>
-              <a:rPr lang="en-US" dirty="0">
-                <a:effectLst/>
-              </a:rPr>
-              <a:t>METAR reports</a:t>
-            </a:r>
-          </a:p>
-          <a:p>
-            <a:pPr marL="1200150" lvl="1" indent="-457200">
-              <a:buFont typeface="Arial"/>
-              <a:buAutoNum type="arabicParenR"/>
-            </a:pPr>
-            <a:r>
-              <a:rPr lang="en-US" dirty="0">
-                <a:effectLst/>
-              </a:rPr>
-              <a:t>Model data (MOSMIX, </a:t>
-            </a:r>
-            <a:r>
-              <a:rPr lang="en-US" dirty="0" err="1">
-                <a:effectLst/>
-              </a:rPr>
-              <a:t>Met.no</a:t>
-            </a:r>
-            <a:r>
-              <a:rPr lang="en-US" dirty="0">
-                <a:effectLst/>
-              </a:rPr>
-              <a:t>)</a:t>
-            </a:r>
-          </a:p>
-          <a:p>
-            <a:pPr marL="457200" indent="-457200">
-              <a:buFont typeface="Arial" panose="020B0604020202020204" pitchFamily="34" charset="0"/>
-              <a:buChar char="•"/>
-            </a:pPr>
-            <a:r>
-              <a:rPr lang="en-US" b="0" dirty="0">
-                <a:effectLst/>
-              </a:rPr>
-              <a:t>MOSMIX: forecast model for filling gaps.</a:t>
-            </a:r>
-            <a:br>
-              <a:rPr lang="en-US" b="0" dirty="0">
-                <a:effectLst/>
-              </a:rPr>
-            </a:br>
-            <a:r>
-              <a:rPr lang="en-US" b="0" dirty="0">
-                <a:effectLst/>
-              </a:rPr>
-              <a:t>No documentation but great performances (SHOW EXAMPLES)</a:t>
-            </a:r>
-          </a:p>
-          <a:p>
-            <a:pPr marL="457200" indent="-457200">
-              <a:buFont typeface="Arial" panose="020B0604020202020204" pitchFamily="34" charset="0"/>
-              <a:buChar char="•"/>
-            </a:pPr>
-            <a:r>
-              <a:rPr lang="en-US" b="0" dirty="0"/>
-              <a:t>~2700 locations rather than ~1200 </a:t>
-            </a:r>
-            <a:br>
-              <a:rPr lang="en-US" b="0" dirty="0"/>
-            </a:br>
-            <a:r>
-              <a:rPr lang="en-US" b="0" dirty="0"/>
-              <a:t>(SHOW MAP)</a:t>
-            </a:r>
-            <a:endParaRPr lang="en-US" b="0" dirty="0">
-              <a:effectLst/>
-            </a:endParaRPr>
-          </a:p>
-          <a:p>
-            <a:pPr marL="457200" indent="-457200">
-              <a:buFont typeface="Arial" panose="020B0604020202020204" pitchFamily="34" charset="0"/>
-              <a:buChar char="•"/>
-            </a:pPr>
-            <a:endParaRPr lang="en-US" b="0" dirty="0">
-              <a:effectLst/>
-            </a:endParaRPr>
-          </a:p>
-          <a:p>
-            <a:pPr marL="457200" indent="-457200">
-              <a:buFont typeface="Arial" panose="020B0604020202020204" pitchFamily="34" charset="0"/>
-              <a:buChar char="•"/>
-            </a:pPr>
-            <a:endParaRPr lang="en-US" b="0" dirty="0">
-              <a:effectLst/>
-            </a:endParaRPr>
-          </a:p>
-          <a:p>
-            <a:pPr lvl="1" indent="0">
-              <a:buNone/>
-            </a:pPr>
-            <a:endParaRPr lang="en-US" dirty="0">
-              <a:effectLst/>
-            </a:endParaRPr>
-          </a:p>
-          <a:p>
-            <a:pPr marL="1200150" lvl="1" indent="-457200">
-              <a:buFont typeface="Arial"/>
-              <a:buAutoNum type="arabicParenR"/>
-            </a:pPr>
-            <a:endParaRPr lang="en-US" dirty="0">
-              <a:effectLst/>
-            </a:endParaRPr>
-          </a:p>
-          <a:p>
-            <a:pPr marL="1200150" lvl="1" indent="-457200">
-              <a:buAutoNum type="arabicParenR"/>
-            </a:pPr>
-            <a:endParaRPr lang="en-US" b="0" dirty="0"/>
-          </a:p>
-          <a:p>
-            <a:pPr marL="457200" indent="-457200">
-              <a:buAutoNum type="arabicParenR"/>
-            </a:pPr>
-            <a:endParaRPr lang="en-US" b="0" dirty="0"/>
-          </a:p>
-          <a:p>
-            <a:pPr marL="342900" indent="-342900">
-              <a:buFont typeface="Arial" panose="020B0604020202020204" pitchFamily="34" charset="0"/>
-              <a:buChar char="•"/>
-            </a:pPr>
-            <a:endParaRPr lang="en-US" b="0" dirty="0"/>
-          </a:p>
-          <a:p>
-            <a:endParaRPr lang="en-US" b="0" dirty="0"/>
-          </a:p>
-        </p:txBody>
-      </p:sp>
-      <p:pic>
-        <p:nvPicPr>
-          <p:cNvPr id="7" name="Picture 6" descr="A screenshot of a computer&#10;&#10;Description automatically generated">
-            <a:extLst>
-              <a:ext uri="{FF2B5EF4-FFF2-40B4-BE49-F238E27FC236}">
-                <a16:creationId xmlns:a16="http://schemas.microsoft.com/office/drawing/2014/main" id="{FA236948-4C9F-09A1-4040-7AEA2FC5EB0D}"/>
+                <a16:creationId xmlns:a16="http://schemas.microsoft.com/office/drawing/2014/main" id="{1DF149CF-BCB1-191C-6A9E-B0C0C9D7438A}"/>
               </a:ext>
             </a:extLst>
           </p:cNvPr>
@@ -27742,25 +27597,270 @@
           <p:nvPr/>
         </p:nvPicPr>
         <p:blipFill>
-          <a:blip r:embed="rId4"/>
+          <a:blip r:embed="rId2"/>
           <a:stretch>
             <a:fillRect/>
           </a:stretch>
         </p:blipFill>
         <p:spPr>
           <a:xfrm>
-            <a:off x="4853770" y="1118159"/>
-            <a:ext cx="4290230" cy="3749088"/>
+            <a:off x="4208388" y="1070095"/>
+            <a:ext cx="4935612" cy="3516108"/>
           </a:xfrm>
           <a:prstGeom prst="rect">
             <a:avLst/>
           </a:prstGeom>
         </p:spPr>
       </p:pic>
+      <p:sp>
+        <p:nvSpPr>
+          <p:cNvPr id="5" name="TextBox 4">
+            <a:extLst>
+              <a:ext uri="{FF2B5EF4-FFF2-40B4-BE49-F238E27FC236}">
+                <a16:creationId xmlns:a16="http://schemas.microsoft.com/office/drawing/2014/main" id="{3316F872-E403-FB6C-BD76-F4DB903B6743}"/>
+              </a:ext>
+            </a:extLst>
+          </p:cNvPr>
+          <p:cNvSpPr txBox="1"/>
+          <p:nvPr/>
+        </p:nvSpPr>
+        <p:spPr>
+          <a:xfrm>
+            <a:off x="457199" y="1260682"/>
+            <a:ext cx="3579147" cy="3139321"/>
+          </a:xfrm>
+          <a:prstGeom prst="rect">
+            <a:avLst/>
+          </a:prstGeom>
+          <a:noFill/>
+        </p:spPr>
+        <p:txBody>
+          <a:bodyPr wrap="square" rtlCol="0">
+            <a:spAutoFit/>
+          </a:bodyPr>
+          <a:lstStyle/>
+          <a:p>
+            <a:pPr marL="285750" indent="-285750">
+              <a:buFont typeface="Arial" panose="020B0604020202020204" pitchFamily="34" charset="0"/>
+              <a:buChar char="•"/>
+            </a:pPr>
+            <a:r>
+              <a:rPr lang="en-US" dirty="0"/>
+              <a:t>Upscaling from 4x4km to 50x50km cells, BUT:</a:t>
+            </a:r>
+          </a:p>
+          <a:p>
+            <a:pPr marL="800100" lvl="1" indent="-342900">
+              <a:buFont typeface="+mj-lt"/>
+              <a:buAutoNum type="arabicPeriod"/>
+            </a:pPr>
+            <a:r>
+              <a:rPr lang="en-US" dirty="0"/>
+              <a:t>Data available everywhere in the world (yes, also AK)</a:t>
+            </a:r>
+          </a:p>
+          <a:p>
+            <a:pPr marL="800100" lvl="1" indent="-342900">
+              <a:buFont typeface="+mj-lt"/>
+              <a:buAutoNum type="arabicPeriod"/>
+            </a:pPr>
+            <a:r>
+              <a:rPr lang="en-US" dirty="0"/>
+              <a:t>Data available almost real-time</a:t>
+            </a:r>
+          </a:p>
+          <a:p>
+            <a:pPr marL="342900" indent="-342900">
+              <a:buFont typeface="Arial" panose="020B0604020202020204" pitchFamily="34" charset="0"/>
+              <a:buChar char="•"/>
+            </a:pPr>
+            <a:r>
+              <a:rPr lang="en-US" dirty="0"/>
+              <a:t>MERRA-2 provides full EPWs. </a:t>
+            </a:r>
+            <a:br>
+              <a:rPr lang="en-US" dirty="0"/>
+            </a:br>
+            <a:r>
+              <a:rPr lang="en-US" dirty="0" err="1"/>
+              <a:t>EPWgen</a:t>
+            </a:r>
+            <a:r>
+              <a:rPr lang="en-US" dirty="0"/>
+              <a:t> uses that as a backbone and swaps in:</a:t>
+            </a:r>
+          </a:p>
+          <a:p>
+            <a:pPr marL="742950" lvl="1" indent="-285750">
+              <a:buFont typeface="Arial" panose="020B0604020202020204" pitchFamily="34" charset="0"/>
+              <a:buChar char="•"/>
+            </a:pPr>
+            <a:endParaRPr lang="en-US" dirty="0"/>
+          </a:p>
+          <a:p>
+            <a:pPr marL="285750" indent="-285750">
+              <a:buFont typeface="Arial" panose="020B0604020202020204" pitchFamily="34" charset="0"/>
+              <a:buChar char="•"/>
+            </a:pPr>
+            <a:endParaRPr lang="en-US" dirty="0"/>
+          </a:p>
+        </p:txBody>
+      </p:sp>
+      <p:sp>
+        <p:nvSpPr>
+          <p:cNvPr id="6" name="TextBox 5">
+            <a:extLst>
+              <a:ext uri="{FF2B5EF4-FFF2-40B4-BE49-F238E27FC236}">
+                <a16:creationId xmlns:a16="http://schemas.microsoft.com/office/drawing/2014/main" id="{E0E663DC-1AEB-0319-AEA0-5811A2B692C9}"/>
+              </a:ext>
+            </a:extLst>
+          </p:cNvPr>
+          <p:cNvSpPr txBox="1"/>
+          <p:nvPr/>
+        </p:nvSpPr>
+        <p:spPr>
+          <a:xfrm>
+            <a:off x="853276" y="3817890"/>
+            <a:ext cx="2982876" cy="2031325"/>
+          </a:xfrm>
+          <a:prstGeom prst="rect">
+            <a:avLst/>
+          </a:prstGeom>
+          <a:noFill/>
+        </p:spPr>
+        <p:txBody>
+          <a:bodyPr wrap="square" numCol="2" rtlCol="0">
+            <a:spAutoFit/>
+          </a:bodyPr>
+          <a:lstStyle/>
+          <a:p>
+            <a:pPr marL="800100" lvl="1" indent="-342900">
+              <a:buFont typeface="Arial" panose="020B0604020202020204" pitchFamily="34" charset="0"/>
+              <a:buChar char="•"/>
+            </a:pPr>
+            <a:r>
+              <a:rPr lang="en-US" sz="1400" dirty="0" err="1"/>
+              <a:t>Tdb</a:t>
+            </a:r>
+            <a:endParaRPr lang="en-US" sz="1400" dirty="0"/>
+          </a:p>
+          <a:p>
+            <a:pPr marL="800100" lvl="1" indent="-342900">
+              <a:buFont typeface="Arial" panose="020B0604020202020204" pitchFamily="34" charset="0"/>
+              <a:buChar char="•"/>
+            </a:pPr>
+            <a:r>
+              <a:rPr lang="en-US" sz="1400" dirty="0" err="1"/>
+              <a:t>Tdew</a:t>
+            </a:r>
+            <a:endParaRPr lang="en-US" sz="1400" dirty="0"/>
+          </a:p>
+          <a:p>
+            <a:pPr marL="800100" lvl="1" indent="-342900">
+              <a:buFont typeface="Arial" panose="020B0604020202020204" pitchFamily="34" charset="0"/>
+              <a:buChar char="•"/>
+            </a:pPr>
+            <a:r>
+              <a:rPr lang="en-US" sz="1400" dirty="0"/>
+              <a:t>RH</a:t>
+            </a:r>
+          </a:p>
+          <a:p>
+            <a:pPr marL="800100" lvl="1" indent="-342900">
+              <a:buFont typeface="Arial" panose="020B0604020202020204" pitchFamily="34" charset="0"/>
+              <a:buChar char="•"/>
+            </a:pPr>
+            <a:r>
+              <a:rPr lang="en-US" sz="1400" dirty="0"/>
+              <a:t>P</a:t>
+            </a:r>
+          </a:p>
+          <a:p>
+            <a:pPr marL="800100" lvl="1" indent="-342900">
+              <a:buFont typeface="Arial" panose="020B0604020202020204" pitchFamily="34" charset="0"/>
+              <a:buChar char="•"/>
+            </a:pPr>
+            <a:endParaRPr lang="en-US" sz="1400" dirty="0"/>
+          </a:p>
+          <a:p>
+            <a:pPr marL="800100" lvl="1" indent="-342900">
+              <a:buFont typeface="Arial" panose="020B0604020202020204" pitchFamily="34" charset="0"/>
+              <a:buChar char="•"/>
+            </a:pPr>
+            <a:endParaRPr lang="en-US" sz="1400" dirty="0"/>
+          </a:p>
+          <a:p>
+            <a:pPr marL="800100" lvl="1" indent="-342900">
+              <a:buFont typeface="Arial" panose="020B0604020202020204" pitchFamily="34" charset="0"/>
+              <a:buChar char="•"/>
+            </a:pPr>
+            <a:endParaRPr lang="en-US" sz="1400" dirty="0"/>
+          </a:p>
+          <a:p>
+            <a:pPr marL="800100" lvl="1" indent="-342900">
+              <a:buFont typeface="Arial" panose="020B0604020202020204" pitchFamily="34" charset="0"/>
+              <a:buChar char="•"/>
+            </a:pPr>
+            <a:endParaRPr lang="en-US" sz="1400" dirty="0"/>
+          </a:p>
+          <a:p>
+            <a:pPr marL="800100" lvl="1" indent="-342900">
+              <a:buFont typeface="Arial" panose="020B0604020202020204" pitchFamily="34" charset="0"/>
+              <a:buChar char="•"/>
+            </a:pPr>
+            <a:endParaRPr lang="en-US" sz="1400" dirty="0"/>
+          </a:p>
+          <a:p>
+            <a:pPr marL="800100" lvl="1" indent="-342900">
+              <a:buFont typeface="Arial" panose="020B0604020202020204" pitchFamily="34" charset="0"/>
+              <a:buChar char="•"/>
+            </a:pPr>
+            <a:r>
+              <a:rPr lang="en-US" sz="1400" dirty="0" err="1"/>
+              <a:t>Wdir</a:t>
+            </a:r>
+            <a:endParaRPr lang="en-US" sz="1400" dirty="0"/>
+          </a:p>
+          <a:p>
+            <a:pPr marL="800100" lvl="1" indent="-342900">
+              <a:buFont typeface="Arial" panose="020B0604020202020204" pitchFamily="34" charset="0"/>
+              <a:buChar char="•"/>
+            </a:pPr>
+            <a:r>
+              <a:rPr lang="en-US" sz="1400" dirty="0" err="1"/>
+              <a:t>Wspeed</a:t>
+            </a:r>
+            <a:endParaRPr lang="en-US" sz="1400" dirty="0"/>
+          </a:p>
+          <a:p>
+            <a:pPr marL="800100" lvl="1" indent="-342900">
+              <a:buFont typeface="Arial" panose="020B0604020202020204" pitchFamily="34" charset="0"/>
+              <a:buChar char="•"/>
+            </a:pPr>
+            <a:r>
+              <a:rPr lang="en-US" sz="1400" dirty="0"/>
+              <a:t>Rain</a:t>
+            </a:r>
+          </a:p>
+          <a:p>
+            <a:pPr marL="800100" lvl="1" indent="-342900">
+              <a:buFont typeface="Arial" panose="020B0604020202020204" pitchFamily="34" charset="0"/>
+              <a:buChar char="•"/>
+            </a:pPr>
+            <a:r>
+              <a:rPr lang="en-US" sz="1400" dirty="0"/>
+              <a:t>Snow </a:t>
+            </a:r>
+          </a:p>
+          <a:p>
+            <a:endParaRPr lang="en-US" dirty="0"/>
+          </a:p>
+        </p:txBody>
+      </p:sp>
     </p:spTree>
     <p:extLst>
       <p:ext uri="{BB962C8B-B14F-4D97-AF65-F5344CB8AC3E}">
-        <p14:creationId xmlns:p14="http://schemas.microsoft.com/office/powerpoint/2010/main" val="189515511"/>
+        <p14:creationId xmlns:p14="http://schemas.microsoft.com/office/powerpoint/2010/main" val="2434670469"/>
       </p:ext>
     </p:extLst>
   </p:cSld>
@@ -27809,9 +27909,10 @@
           <a:lstStyle/>
           <a:p>
             <a:r>
-              <a:rPr lang="en-US" dirty="0"/>
-              <a:t>Design conditions</a:t>
-            </a:r>
+              <a:rPr lang="en-US" dirty="0" err="1"/>
+              <a:t>Meteostat</a:t>
+            </a:r>
+            <a:endParaRPr lang="en-US" dirty="0"/>
           </a:p>
         </p:txBody>
       </p:sp>
@@ -27834,12 +27935,12 @@
         <p:spPr>
           <a:xfrm>
             <a:off x="457198" y="1118159"/>
-            <a:ext cx="4314995" cy="3789301"/>
+            <a:ext cx="4492795" cy="3242825"/>
           </a:xfrm>
         </p:spPr>
         <p:txBody>
           <a:bodyPr>
-            <a:normAutofit/>
+            <a:normAutofit fontScale="70000" lnSpcReduction="20000"/>
           </a:bodyPr>
           <a:lstStyle/>
           <a:p>
@@ -27849,8 +27950,15 @@
             </a:pPr>
             <a:r>
               <a:rPr lang="en-US" b="0" dirty="0"/>
-              <a:t>2021 Design conditions extracted from all published ASHRAE locations.</a:t>
-            </a:r>
+              <a:t>Free open library </a:t>
+            </a:r>
+            <a:r>
+              <a:rPr lang="en-US" b="0" dirty="0">
+                <a:hlinkClick r:id="rId3"/>
+              </a:rPr>
+              <a:t>https://dev.meteostat.net/</a:t>
+            </a:r>
+            <a:endParaRPr lang="en-US" b="0" dirty="0"/>
           </a:p>
           <a:p>
             <a:pPr marL="457200" indent="-457200">
@@ -27858,14 +27966,8 @@
               <a:buChar char="•"/>
             </a:pPr>
             <a:r>
-              <a:rPr lang="en-US" b="0" dirty="0">
-                <a:effectLst/>
-              </a:rPr>
-              <a:t>N</a:t>
-            </a:r>
-            <a:r>
               <a:rPr lang="en-US" b="0" dirty="0"/>
-              <a:t>o DDYs/STATs creation</a:t>
+              <a:t>Real-time data</a:t>
             </a:r>
           </a:p>
           <a:p>
@@ -27874,10 +27976,80 @@
               <a:buChar char="•"/>
             </a:pPr>
             <a:r>
-              <a:rPr lang="en-US" b="0" dirty="0">
+              <a:rPr lang="en-US" b="0" dirty="0"/>
+              <a:t>Data Sources:</a:t>
+            </a:r>
+          </a:p>
+          <a:p>
+            <a:pPr marL="1200150" lvl="1" indent="-457200">
+              <a:buFont typeface="Arial"/>
+              <a:buAutoNum type="arabicParenR"/>
+            </a:pPr>
+            <a:r>
+              <a:rPr lang="en-US" dirty="0">
                 <a:effectLst/>
               </a:rPr>
-              <a:t>No Ground Temperatures in header</a:t>
+              <a:t>National weather service</a:t>
+            </a:r>
+          </a:p>
+          <a:p>
+            <a:pPr marL="1200150" lvl="1" indent="-457200">
+              <a:buFont typeface="Arial"/>
+              <a:buAutoNum type="arabicParenR"/>
+            </a:pPr>
+            <a:r>
+              <a:rPr lang="en-US" dirty="0">
+                <a:effectLst/>
+              </a:rPr>
+              <a:t>Global dataset (ISD)</a:t>
+            </a:r>
+          </a:p>
+          <a:p>
+            <a:pPr marL="1200150" lvl="1" indent="-457200">
+              <a:buFont typeface="Arial"/>
+              <a:buAutoNum type="arabicParenR"/>
+            </a:pPr>
+            <a:r>
+              <a:rPr lang="en-US" dirty="0">
+                <a:effectLst/>
+              </a:rPr>
+              <a:t>SYNOP reports</a:t>
+            </a:r>
+          </a:p>
+          <a:p>
+            <a:pPr marL="1200150" lvl="1" indent="-457200">
+              <a:buFont typeface="Arial"/>
+              <a:buAutoNum type="arabicParenR"/>
+            </a:pPr>
+            <a:r>
+              <a:rPr lang="en-US" dirty="0">
+                <a:effectLst/>
+              </a:rPr>
+              <a:t>METAR reports</a:t>
+            </a:r>
+          </a:p>
+          <a:p>
+            <a:pPr marL="1200150" lvl="1" indent="-457200">
+              <a:buFont typeface="Arial"/>
+              <a:buAutoNum type="arabicParenR"/>
+            </a:pPr>
+            <a:r>
+              <a:rPr lang="en-US" dirty="0">
+                <a:effectLst/>
+              </a:rPr>
+              <a:t>Model data (MOSMIX, </a:t>
+            </a:r>
+            <a:r>
+              <a:rPr lang="en-US" dirty="0" err="1">
+                <a:effectLst/>
+              </a:rPr>
+              <a:t>Met.no</a:t>
+            </a:r>
+            <a:r>
+              <a:rPr lang="en-US" dirty="0">
+                <a:effectLst/>
+              </a:rPr>
+              <a:t>)</a:t>
             </a:r>
           </a:p>
           <a:p>
@@ -27886,8 +28058,38 @@
               <a:buChar char="•"/>
             </a:pPr>
             <a:r>
+              <a:rPr lang="en-US" b="0" dirty="0">
+                <a:effectLst/>
+              </a:rPr>
+              <a:t>MOSMIX: forecast model for filling gaps.</a:t>
+            </a:r>
+            <a:br>
+              <a:rPr lang="en-US" b="0" dirty="0">
+                <a:effectLst/>
+              </a:rPr>
+            </a:br>
+            <a:r>
+              <a:rPr lang="en-US" b="0" dirty="0">
+                <a:effectLst/>
+              </a:rPr>
+              <a:t>No documentation but great performances (SHOW EXAMPLES)</a:t>
+            </a:r>
+          </a:p>
+          <a:p>
+            <a:pPr marL="457200" indent="-457200">
+              <a:buFont typeface="Arial" panose="020B0604020202020204" pitchFamily="34" charset="0"/>
+              <a:buChar char="•"/>
+            </a:pPr>
+            <a:r>
               <a:rPr lang="en-US" b="0" dirty="0"/>
-              <a:t>No typical/extreme period in the header</a:t>
+              <a:t>~2700 locations rather than ~1200 </a:t>
+            </a:r>
+            <a:br>
+              <a:rPr lang="en-US" b="0" dirty="0"/>
+            </a:br>
+            <a:r>
+              <a:rPr lang="en-US" b="0" dirty="0"/>
+              <a:t>(SHOW MAP)</a:t>
             </a:r>
             <a:endParaRPr lang="en-US" b="0" dirty="0">
               <a:effectLst/>
@@ -27912,6 +28114,14 @@
             </a:endParaRPr>
           </a:p>
           <a:p>
+            <a:pPr lvl="1" indent="0">
+              <a:buNone/>
+            </a:pPr>
+            <a:endParaRPr lang="en-US" dirty="0">
+              <a:effectLst/>
+            </a:endParaRPr>
+          </a:p>
+          <a:p>
             <a:pPr marL="1200150" lvl="1" indent="-457200">
               <a:buFont typeface="Arial"/>
               <a:buAutoNum type="arabicParenR"/>
@@ -27922,15 +28132,6 @@
           </a:p>
           <a:p>
             <a:pPr marL="1200150" lvl="1" indent="-457200">
-              <a:buFont typeface="Arial"/>
-              <a:buAutoNum type="arabicParenR"/>
-            </a:pPr>
-            <a:endParaRPr lang="en-US" dirty="0">
-              <a:effectLst/>
-            </a:endParaRPr>
-          </a:p>
-          <a:p>
-            <a:pPr marL="1200150" lvl="1" indent="-457200">
               <a:buAutoNum type="arabicParenR"/>
             </a:pPr>
             <a:endParaRPr lang="en-US" b="0" dirty="0"/>
@@ -27955,10 +28156,10 @@
       </p:sp>
       <p:pic>
         <p:nvPicPr>
-          <p:cNvPr id="5" name="Picture 4" descr="A table of numbers and a number of numbers&#10;&#10;Description automatically generated with medium confidence">
+          <p:cNvPr id="7" name="Picture 6" descr="A screenshot of a computer&#10;&#10;Description automatically generated">
             <a:extLst>
               <a:ext uri="{FF2B5EF4-FFF2-40B4-BE49-F238E27FC236}">
-                <a16:creationId xmlns:a16="http://schemas.microsoft.com/office/drawing/2014/main" id="{340230D0-D17A-DB5C-18BB-313694CD9127}"/>
+                <a16:creationId xmlns:a16="http://schemas.microsoft.com/office/drawing/2014/main" id="{FA236948-4C9F-09A1-4040-7AEA2FC5EB0D}"/>
               </a:ext>
             </a:extLst>
           </p:cNvPr>
@@ -27968,15 +28169,15 @@
           <p:nvPr/>
         </p:nvPicPr>
         <p:blipFill>
-          <a:blip r:embed="rId3"/>
+          <a:blip r:embed="rId4"/>
           <a:stretch>
             <a:fillRect/>
           </a:stretch>
         </p:blipFill>
         <p:spPr>
           <a:xfrm>
-            <a:off x="5066683" y="0"/>
-            <a:ext cx="4077317" cy="5143500"/>
+            <a:off x="4853770" y="1118159"/>
+            <a:ext cx="4290230" cy="3749088"/>
           </a:xfrm>
           <a:prstGeom prst="rect">
             <a:avLst/>
@@ -27986,7 +28187,7 @@
     </p:spTree>
     <p:extLst>
       <p:ext uri="{BB962C8B-B14F-4D97-AF65-F5344CB8AC3E}">
-        <p14:creationId xmlns:p14="http://schemas.microsoft.com/office/powerpoint/2010/main" val="2413167952"/>
+        <p14:creationId xmlns:p14="http://schemas.microsoft.com/office/powerpoint/2010/main" val="189515511"/>
       </p:ext>
     </p:extLst>
   </p:cSld>
@@ -28036,7 +28237,7 @@
           <a:p>
             <a:r>
               <a:rPr lang="en-US" dirty="0"/>
-              <a:t>DEMO</a:t>
+              <a:t>Design conditions</a:t>
             </a:r>
           </a:p>
         </p:txBody>
@@ -28073,6 +28274,48 @@
               <a:buFont typeface="Arial" panose="020B0604020202020204" pitchFamily="34" charset="0"/>
               <a:buChar char="•"/>
             </a:pPr>
+            <a:r>
+              <a:rPr lang="en-US" b="0" dirty="0"/>
+              <a:t>2021 Design conditions extracted from all published ASHRAE locations.</a:t>
+            </a:r>
+          </a:p>
+          <a:p>
+            <a:pPr marL="457200" indent="-457200">
+              <a:buFont typeface="Arial" panose="020B0604020202020204" pitchFamily="34" charset="0"/>
+              <a:buChar char="•"/>
+            </a:pPr>
+            <a:r>
+              <a:rPr lang="en-US" b="0" dirty="0">
+                <a:effectLst/>
+              </a:rPr>
+              <a:t>N</a:t>
+            </a:r>
+            <a:r>
+              <a:rPr lang="en-US" b="0" dirty="0"/>
+              <a:t>o DDYs/STATs creation</a:t>
+            </a:r>
+          </a:p>
+          <a:p>
+            <a:pPr marL="457200" indent="-457200">
+              <a:buFont typeface="Arial" panose="020B0604020202020204" pitchFamily="34" charset="0"/>
+              <a:buChar char="•"/>
+            </a:pPr>
+            <a:r>
+              <a:rPr lang="en-US" b="0" dirty="0">
+                <a:effectLst/>
+              </a:rPr>
+              <a:t>No Ground Temperatures in header</a:t>
+            </a:r>
+          </a:p>
+          <a:p>
+            <a:pPr marL="457200" indent="-457200">
+              <a:buFont typeface="Arial" panose="020B0604020202020204" pitchFamily="34" charset="0"/>
+              <a:buChar char="•"/>
+            </a:pPr>
+            <a:r>
+              <a:rPr lang="en-US" b="0" dirty="0"/>
+              <a:t>No typical/extreme period in the header</a:t>
+            </a:r>
             <a:endParaRPr lang="en-US" b="0" dirty="0">
               <a:effectLst/>
             </a:endParaRPr>
@@ -28087,6 +28330,15 @@
             </a:endParaRPr>
           </a:p>
           <a:p>
+            <a:pPr marL="457200" indent="-457200">
+              <a:buFont typeface="Arial" panose="020B0604020202020204" pitchFamily="34" charset="0"/>
+              <a:buChar char="•"/>
+            </a:pPr>
+            <a:endParaRPr lang="en-US" b="0" dirty="0">
+              <a:effectLst/>
+            </a:endParaRPr>
+          </a:p>
+          <a:p>
             <a:pPr marL="1200150" lvl="1" indent="-457200">
               <a:buFont typeface="Arial"/>
               <a:buAutoNum type="arabicParenR"/>
@@ -28130,10 +28382,10 @@
       </p:sp>
       <p:pic>
         <p:nvPicPr>
-          <p:cNvPr id="4" name="Picture 3" descr="A screenshot of a computer&#10;&#10;Description automatically generated">
+          <p:cNvPr id="5" name="Picture 4" descr="A table of numbers and a number of numbers&#10;&#10;Description automatically generated with medium confidence">
             <a:extLst>
               <a:ext uri="{FF2B5EF4-FFF2-40B4-BE49-F238E27FC236}">
-                <a16:creationId xmlns:a16="http://schemas.microsoft.com/office/drawing/2014/main" id="{80C5E0DC-06C1-45C2-1417-4E39B3D55905}"/>
+                <a16:creationId xmlns:a16="http://schemas.microsoft.com/office/drawing/2014/main" id="{340230D0-D17A-DB5C-18BB-313694CD9127}"/>
               </a:ext>
             </a:extLst>
           </p:cNvPr>
@@ -28144,554 +28396,24 @@
         </p:nvPicPr>
         <p:blipFill>
           <a:blip r:embed="rId3"/>
-          <a:srcRect t="1163"/>
-          <a:stretch/>
+          <a:stretch>
+            <a:fillRect/>
+          </a:stretch>
         </p:blipFill>
         <p:spPr>
           <a:xfrm>
-            <a:off x="5674543" y="1561678"/>
-            <a:ext cx="3560857" cy="2902261"/>
+            <a:off x="5066683" y="0"/>
+            <a:ext cx="4077317" cy="5143500"/>
           </a:xfrm>
           <a:prstGeom prst="rect">
             <a:avLst/>
           </a:prstGeom>
         </p:spPr>
       </p:pic>
-      <p:sp>
-        <p:nvSpPr>
-          <p:cNvPr id="6" name="TextBox 5">
-            <a:extLst>
-              <a:ext uri="{FF2B5EF4-FFF2-40B4-BE49-F238E27FC236}">
-                <a16:creationId xmlns:a16="http://schemas.microsoft.com/office/drawing/2014/main" id="{414BC100-C2B1-52CF-E9F9-78FF30902AAF}"/>
-              </a:ext>
-            </a:extLst>
-          </p:cNvPr>
-          <p:cNvSpPr txBox="1"/>
-          <p:nvPr/>
-        </p:nvSpPr>
-        <p:spPr>
-          <a:xfrm>
-            <a:off x="546476" y="1450054"/>
-            <a:ext cx="1525803" cy="1477328"/>
-          </a:xfrm>
-          <a:prstGeom prst="rect">
-            <a:avLst/>
-          </a:prstGeom>
-          <a:noFill/>
-          <a:ln>
-            <a:solidFill>
-              <a:schemeClr val="accent1"/>
-            </a:solidFill>
-          </a:ln>
-        </p:spPr>
-        <p:txBody>
-          <a:bodyPr wrap="square" rtlCol="0">
-            <a:spAutoFit/>
-          </a:bodyPr>
-          <a:lstStyle/>
-          <a:p>
-            <a:r>
-              <a:rPr lang="en-US" dirty="0"/>
-              <a:t>Input:</a:t>
-            </a:r>
-          </a:p>
-          <a:p>
-            <a:pPr marL="285750" indent="-285750">
-              <a:buFont typeface="Arial" panose="020B0604020202020204" pitchFamily="34" charset="0"/>
-              <a:buChar char="•"/>
-            </a:pPr>
-            <a:r>
-              <a:rPr lang="en-US" dirty="0"/>
-              <a:t>Latitude</a:t>
-            </a:r>
-          </a:p>
-          <a:p>
-            <a:pPr marL="285750" indent="-285750">
-              <a:buFont typeface="Arial" panose="020B0604020202020204" pitchFamily="34" charset="0"/>
-              <a:buChar char="•"/>
-            </a:pPr>
-            <a:r>
-              <a:rPr lang="en-US" dirty="0"/>
-              <a:t>Longitude</a:t>
-            </a:r>
-          </a:p>
-          <a:p>
-            <a:pPr marL="285750" indent="-285750">
-              <a:buFont typeface="Arial" panose="020B0604020202020204" pitchFamily="34" charset="0"/>
-              <a:buChar char="•"/>
-            </a:pPr>
-            <a:r>
-              <a:rPr lang="en-US" dirty="0"/>
-              <a:t>Year</a:t>
-            </a:r>
-          </a:p>
-          <a:p>
-            <a:pPr marL="285750" indent="-285750">
-              <a:buFont typeface="Arial" panose="020B0604020202020204" pitchFamily="34" charset="0"/>
-              <a:buChar char="•"/>
-            </a:pPr>
-            <a:r>
-              <a:rPr lang="en-US" dirty="0"/>
-              <a:t>Name</a:t>
-            </a:r>
-          </a:p>
-        </p:txBody>
-      </p:sp>
-      <p:cxnSp>
-        <p:nvCxnSpPr>
-          <p:cNvPr id="8" name="Straight Arrow Connector 7">
-            <a:extLst>
-              <a:ext uri="{FF2B5EF4-FFF2-40B4-BE49-F238E27FC236}">
-                <a16:creationId xmlns:a16="http://schemas.microsoft.com/office/drawing/2014/main" id="{2FED1DBD-882C-B984-2BED-473DFE4C6ABD}"/>
-              </a:ext>
-            </a:extLst>
-          </p:cNvPr>
-          <p:cNvCxnSpPr>
-            <a:cxnSpLocks/>
-            <a:stCxn id="6" idx="3"/>
-            <a:endCxn id="13" idx="1"/>
-          </p:cNvCxnSpPr>
-          <p:nvPr/>
-        </p:nvCxnSpPr>
-        <p:spPr>
-          <a:xfrm flipV="1">
-            <a:off x="2072279" y="1579824"/>
-            <a:ext cx="555496" cy="608894"/>
-          </a:xfrm>
-          <a:prstGeom prst="straightConnector1">
-            <a:avLst/>
-          </a:prstGeom>
-          <a:ln>
-            <a:tailEnd type="triangle"/>
-          </a:ln>
-        </p:spPr>
-        <p:style>
-          <a:lnRef idx="2">
-            <a:schemeClr val="accent1"/>
-          </a:lnRef>
-          <a:fillRef idx="0">
-            <a:schemeClr val="accent1"/>
-          </a:fillRef>
-          <a:effectRef idx="1">
-            <a:schemeClr val="accent1"/>
-          </a:effectRef>
-          <a:fontRef idx="minor">
-            <a:schemeClr val="tx1"/>
-          </a:fontRef>
-        </p:style>
-      </p:cxnSp>
-      <p:sp>
-        <p:nvSpPr>
-          <p:cNvPr id="9" name="TextBox 8">
-            <a:extLst>
-              <a:ext uri="{FF2B5EF4-FFF2-40B4-BE49-F238E27FC236}">
-                <a16:creationId xmlns:a16="http://schemas.microsoft.com/office/drawing/2014/main" id="{A9682608-3A0F-E7DD-2690-23E32ECE04A6}"/>
-              </a:ext>
-            </a:extLst>
-          </p:cNvPr>
-          <p:cNvSpPr txBox="1"/>
-          <p:nvPr/>
-        </p:nvSpPr>
-        <p:spPr>
-          <a:xfrm>
-            <a:off x="2627774" y="3419678"/>
-            <a:ext cx="2927157" cy="369332"/>
-          </a:xfrm>
-          <a:prstGeom prst="rect">
-            <a:avLst/>
-          </a:prstGeom>
-          <a:noFill/>
-          <a:ln>
-            <a:solidFill>
-              <a:schemeClr val="accent1"/>
-            </a:solidFill>
-          </a:ln>
-        </p:spPr>
-        <p:txBody>
-          <a:bodyPr wrap="square" rtlCol="0">
-            <a:spAutoFit/>
-          </a:bodyPr>
-          <a:lstStyle/>
-          <a:p>
-            <a:r>
-              <a:rPr lang="en-US" dirty="0"/>
-              <a:t>3) Splice the two </a:t>
-            </a:r>
-            <a:r>
-              <a:rPr lang="en-US" dirty="0" err="1"/>
-              <a:t>daframes</a:t>
-            </a:r>
-            <a:endParaRPr lang="en-US" dirty="0"/>
-          </a:p>
-        </p:txBody>
-      </p:sp>
-      <p:sp>
-        <p:nvSpPr>
-          <p:cNvPr id="13" name="TextBox 12">
-            <a:extLst>
-              <a:ext uri="{FF2B5EF4-FFF2-40B4-BE49-F238E27FC236}">
-                <a16:creationId xmlns:a16="http://schemas.microsoft.com/office/drawing/2014/main" id="{97BFDEDC-A081-82E4-77FC-1B8DCE2B3B85}"/>
-              </a:ext>
-            </a:extLst>
-          </p:cNvPr>
-          <p:cNvSpPr txBox="1"/>
-          <p:nvPr/>
-        </p:nvSpPr>
-        <p:spPr>
-          <a:xfrm>
-            <a:off x="2627775" y="1118159"/>
-            <a:ext cx="2927157" cy="923330"/>
-          </a:xfrm>
-          <a:prstGeom prst="rect">
-            <a:avLst/>
-          </a:prstGeom>
-          <a:noFill/>
-          <a:ln>
-            <a:solidFill>
-              <a:schemeClr val="accent1"/>
-            </a:solidFill>
-          </a:ln>
-        </p:spPr>
-        <p:txBody>
-          <a:bodyPr wrap="square" rtlCol="0">
-            <a:spAutoFit/>
-          </a:bodyPr>
-          <a:lstStyle/>
-          <a:p>
-            <a:r>
-              <a:rPr lang="en-US" dirty="0"/>
-              <a:t>1) Find the closest </a:t>
-            </a:r>
-            <a:r>
-              <a:rPr lang="en-US" dirty="0" err="1"/>
-              <a:t>Meteostat</a:t>
-            </a:r>
-            <a:endParaRPr lang="en-US" dirty="0"/>
-          </a:p>
-          <a:p>
-            <a:r>
-              <a:rPr lang="en-US" dirty="0"/>
-              <a:t>location with less than 3h gap within 100mi.</a:t>
-            </a:r>
-          </a:p>
-        </p:txBody>
-      </p:sp>
-      <p:cxnSp>
-        <p:nvCxnSpPr>
-          <p:cNvPr id="17" name="Straight Arrow Connector 16">
-            <a:extLst>
-              <a:ext uri="{FF2B5EF4-FFF2-40B4-BE49-F238E27FC236}">
-                <a16:creationId xmlns:a16="http://schemas.microsoft.com/office/drawing/2014/main" id="{CEA27677-515E-BE8E-B7DB-31FAEBD04889}"/>
-              </a:ext>
-            </a:extLst>
-          </p:cNvPr>
-          <p:cNvCxnSpPr>
-            <a:cxnSpLocks/>
-            <a:stCxn id="13" idx="2"/>
-            <a:endCxn id="21" idx="0"/>
-          </p:cNvCxnSpPr>
-          <p:nvPr/>
-        </p:nvCxnSpPr>
-        <p:spPr>
-          <a:xfrm flipH="1">
-            <a:off x="4091353" y="2041489"/>
-            <a:ext cx="1" cy="222753"/>
-          </a:xfrm>
-          <a:prstGeom prst="straightConnector1">
-            <a:avLst/>
-          </a:prstGeom>
-          <a:ln>
-            <a:tailEnd type="triangle"/>
-          </a:ln>
-        </p:spPr>
-        <p:style>
-          <a:lnRef idx="2">
-            <a:schemeClr val="accent1"/>
-          </a:lnRef>
-          <a:fillRef idx="0">
-            <a:schemeClr val="accent1"/>
-          </a:fillRef>
-          <a:effectRef idx="1">
-            <a:schemeClr val="accent1"/>
-          </a:effectRef>
-          <a:fontRef idx="minor">
-            <a:schemeClr val="tx1"/>
-          </a:fontRef>
-        </p:style>
-      </p:cxnSp>
-      <p:sp>
-        <p:nvSpPr>
-          <p:cNvPr id="21" name="TextBox 20">
-            <a:extLst>
-              <a:ext uri="{FF2B5EF4-FFF2-40B4-BE49-F238E27FC236}">
-                <a16:creationId xmlns:a16="http://schemas.microsoft.com/office/drawing/2014/main" id="{CB796CDF-F4AD-5038-6D99-32324E41A74F}"/>
-              </a:ext>
-            </a:extLst>
-          </p:cNvPr>
-          <p:cNvSpPr txBox="1"/>
-          <p:nvPr/>
-        </p:nvSpPr>
-        <p:spPr>
-          <a:xfrm>
-            <a:off x="2627774" y="2264242"/>
-            <a:ext cx="2927157" cy="923330"/>
-          </a:xfrm>
-          <a:prstGeom prst="rect">
-            <a:avLst/>
-          </a:prstGeom>
-          <a:noFill/>
-          <a:ln>
-            <a:solidFill>
-              <a:schemeClr val="accent1"/>
-            </a:solidFill>
-          </a:ln>
-        </p:spPr>
-        <p:txBody>
-          <a:bodyPr wrap="square" rtlCol="0">
-            <a:spAutoFit/>
-          </a:bodyPr>
-          <a:lstStyle/>
-          <a:p>
-            <a:r>
-              <a:rPr lang="en-US" dirty="0"/>
-              <a:t>2) Gather the EPW for the selected station coordinates from MERRA2</a:t>
-            </a:r>
-          </a:p>
-        </p:txBody>
-      </p:sp>
-      <p:cxnSp>
-        <p:nvCxnSpPr>
-          <p:cNvPr id="27" name="Straight Arrow Connector 26">
-            <a:extLst>
-              <a:ext uri="{FF2B5EF4-FFF2-40B4-BE49-F238E27FC236}">
-                <a16:creationId xmlns:a16="http://schemas.microsoft.com/office/drawing/2014/main" id="{6BE4CF5F-0FA6-64E6-4083-E7748A985F11}"/>
-              </a:ext>
-            </a:extLst>
-          </p:cNvPr>
-          <p:cNvCxnSpPr>
-            <a:cxnSpLocks/>
-            <a:stCxn id="21" idx="2"/>
-            <a:endCxn id="9" idx="0"/>
-          </p:cNvCxnSpPr>
-          <p:nvPr/>
-        </p:nvCxnSpPr>
-        <p:spPr>
-          <a:xfrm>
-            <a:off x="4091353" y="3187572"/>
-            <a:ext cx="0" cy="232106"/>
-          </a:xfrm>
-          <a:prstGeom prst="straightConnector1">
-            <a:avLst/>
-          </a:prstGeom>
-          <a:ln>
-            <a:tailEnd type="triangle"/>
-          </a:ln>
-        </p:spPr>
-        <p:style>
-          <a:lnRef idx="2">
-            <a:schemeClr val="accent1"/>
-          </a:lnRef>
-          <a:fillRef idx="0">
-            <a:schemeClr val="accent1"/>
-          </a:fillRef>
-          <a:effectRef idx="1">
-            <a:schemeClr val="accent1"/>
-          </a:effectRef>
-          <a:fontRef idx="minor">
-            <a:schemeClr val="tx1"/>
-          </a:fontRef>
-        </p:style>
-      </p:cxnSp>
-      <p:sp>
-        <p:nvSpPr>
-          <p:cNvPr id="36" name="TextBox 35">
-            <a:extLst>
-              <a:ext uri="{FF2B5EF4-FFF2-40B4-BE49-F238E27FC236}">
-                <a16:creationId xmlns:a16="http://schemas.microsoft.com/office/drawing/2014/main" id="{C2AE773D-AAB8-7AF0-B078-97127AF3036A}"/>
-              </a:ext>
-            </a:extLst>
-          </p:cNvPr>
-          <p:cNvSpPr txBox="1"/>
-          <p:nvPr/>
-        </p:nvSpPr>
-        <p:spPr>
-          <a:xfrm>
-            <a:off x="2627774" y="4021116"/>
-            <a:ext cx="2927157" cy="923330"/>
-          </a:xfrm>
-          <a:prstGeom prst="rect">
-            <a:avLst/>
-          </a:prstGeom>
-          <a:noFill/>
-          <a:ln>
-            <a:solidFill>
-              <a:schemeClr val="accent1"/>
-            </a:solidFill>
-          </a:ln>
-        </p:spPr>
-        <p:txBody>
-          <a:bodyPr wrap="square" rtlCol="0">
-            <a:spAutoFit/>
-          </a:bodyPr>
-          <a:lstStyle/>
-          <a:p>
-            <a:r>
-              <a:rPr lang="en-US" dirty="0"/>
-              <a:t>4) Insert the header with design conditions and other customized information</a:t>
-            </a:r>
-          </a:p>
-        </p:txBody>
-      </p:sp>
-      <p:cxnSp>
-        <p:nvCxnSpPr>
-          <p:cNvPr id="37" name="Straight Arrow Connector 36">
-            <a:extLst>
-              <a:ext uri="{FF2B5EF4-FFF2-40B4-BE49-F238E27FC236}">
-                <a16:creationId xmlns:a16="http://schemas.microsoft.com/office/drawing/2014/main" id="{951CE1F1-B70C-346D-A828-E37BA3E8B00E}"/>
-              </a:ext>
-            </a:extLst>
-          </p:cNvPr>
-          <p:cNvCxnSpPr>
-            <a:cxnSpLocks/>
-            <a:stCxn id="9" idx="2"/>
-            <a:endCxn id="36" idx="0"/>
-          </p:cNvCxnSpPr>
-          <p:nvPr/>
-        </p:nvCxnSpPr>
-        <p:spPr>
-          <a:xfrm>
-            <a:off x="4091353" y="3789010"/>
-            <a:ext cx="0" cy="232106"/>
-          </a:xfrm>
-          <a:prstGeom prst="straightConnector1">
-            <a:avLst/>
-          </a:prstGeom>
-          <a:ln>
-            <a:tailEnd type="triangle"/>
-          </a:ln>
-        </p:spPr>
-        <p:style>
-          <a:lnRef idx="2">
-            <a:schemeClr val="accent1"/>
-          </a:lnRef>
-          <a:fillRef idx="0">
-            <a:schemeClr val="accent1"/>
-          </a:fillRef>
-          <a:effectRef idx="1">
-            <a:schemeClr val="accent1"/>
-          </a:effectRef>
-          <a:fontRef idx="minor">
-            <a:schemeClr val="tx1"/>
-          </a:fontRef>
-        </p:style>
-      </p:cxnSp>
-      <p:sp>
-        <p:nvSpPr>
-          <p:cNvPr id="44" name="TextBox 43">
-            <a:extLst>
-              <a:ext uri="{FF2B5EF4-FFF2-40B4-BE49-F238E27FC236}">
-                <a16:creationId xmlns:a16="http://schemas.microsoft.com/office/drawing/2014/main" id="{1AFCB497-6BC0-64C7-4F86-7B33C7D7A78A}"/>
-              </a:ext>
-            </a:extLst>
-          </p:cNvPr>
-          <p:cNvSpPr txBox="1"/>
-          <p:nvPr/>
-        </p:nvSpPr>
-        <p:spPr>
-          <a:xfrm>
-            <a:off x="248892" y="3419678"/>
-            <a:ext cx="1942420" cy="1477328"/>
-          </a:xfrm>
-          <a:prstGeom prst="rect">
-            <a:avLst/>
-          </a:prstGeom>
-          <a:noFill/>
-          <a:ln>
-            <a:solidFill>
-              <a:schemeClr val="accent1"/>
-            </a:solidFill>
-          </a:ln>
-        </p:spPr>
-        <p:txBody>
-          <a:bodyPr wrap="square" rtlCol="0">
-            <a:spAutoFit/>
-          </a:bodyPr>
-          <a:lstStyle/>
-          <a:p>
-            <a:r>
-              <a:rPr lang="en-US" dirty="0"/>
-              <a:t>Save EPW file and print out:</a:t>
-            </a:r>
-          </a:p>
-          <a:p>
-            <a:pPr marL="285750" indent="-285750">
-              <a:buFont typeface="Arial" panose="020B0604020202020204" pitchFamily="34" charset="0"/>
-              <a:buChar char="•"/>
-            </a:pPr>
-            <a:r>
-              <a:rPr lang="en-US" dirty="0"/>
-              <a:t>Station distance</a:t>
-            </a:r>
-          </a:p>
-          <a:p>
-            <a:pPr marL="285750" indent="-285750">
-              <a:buFont typeface="Arial" panose="020B0604020202020204" pitchFamily="34" charset="0"/>
-              <a:buChar char="•"/>
-            </a:pPr>
-            <a:r>
-              <a:rPr lang="en-US" dirty="0"/>
-              <a:t>HDD/CDD</a:t>
-            </a:r>
-          </a:p>
-        </p:txBody>
-      </p:sp>
-      <p:cxnSp>
-        <p:nvCxnSpPr>
-          <p:cNvPr id="45" name="Straight Arrow Connector 44">
-            <a:extLst>
-              <a:ext uri="{FF2B5EF4-FFF2-40B4-BE49-F238E27FC236}">
-                <a16:creationId xmlns:a16="http://schemas.microsoft.com/office/drawing/2014/main" id="{713658AD-A818-BFC6-3555-FB7E43106EE5}"/>
-              </a:ext>
-            </a:extLst>
-          </p:cNvPr>
-          <p:cNvCxnSpPr>
-            <a:cxnSpLocks/>
-            <a:stCxn id="36" idx="1"/>
-            <a:endCxn id="44" idx="3"/>
-          </p:cNvCxnSpPr>
-          <p:nvPr/>
-        </p:nvCxnSpPr>
-        <p:spPr>
-          <a:xfrm flipH="1" flipV="1">
-            <a:off x="2191312" y="4158342"/>
-            <a:ext cx="436462" cy="324439"/>
-          </a:xfrm>
-          <a:prstGeom prst="straightConnector1">
-            <a:avLst/>
-          </a:prstGeom>
-          <a:ln>
-            <a:tailEnd type="triangle"/>
-          </a:ln>
-        </p:spPr>
-        <p:style>
-          <a:lnRef idx="2">
-            <a:schemeClr val="accent1"/>
-          </a:lnRef>
-          <a:fillRef idx="0">
-            <a:schemeClr val="accent1"/>
-          </a:fillRef>
-          <a:effectRef idx="1">
-            <a:schemeClr val="accent1"/>
-          </a:effectRef>
-          <a:fontRef idx="minor">
-            <a:schemeClr val="tx1"/>
-          </a:fontRef>
-        </p:style>
-      </p:cxnSp>
     </p:spTree>
     <p:extLst>
       <p:ext uri="{BB962C8B-B14F-4D97-AF65-F5344CB8AC3E}">
-        <p14:creationId xmlns:p14="http://schemas.microsoft.com/office/powerpoint/2010/main" val="3518891770"/>
+        <p14:creationId xmlns:p14="http://schemas.microsoft.com/office/powerpoint/2010/main" val="2413167952"/>
       </p:ext>
     </p:extLst>
   </p:cSld>
@@ -28741,7 +28463,7 @@
           <a:p>
             <a:r>
               <a:rPr lang="en-US" dirty="0"/>
-              <a:t>To summarize:</a:t>
+              <a:t>DEMO</a:t>
             </a:r>
           </a:p>
         </p:txBody>
@@ -28778,66 +28500,6 @@
               <a:buFont typeface="Arial" panose="020B0604020202020204" pitchFamily="34" charset="0"/>
               <a:buChar char="•"/>
             </a:pPr>
-            <a:r>
-              <a:rPr lang="en-US" b="0" dirty="0">
-                <a:effectLst/>
-              </a:rPr>
-              <a:t>More locations</a:t>
-            </a:r>
-          </a:p>
-          <a:p>
-            <a:pPr marL="457200" indent="-457200">
-              <a:buFont typeface="Arial" panose="020B0604020202020204" pitchFamily="34" charset="0"/>
-              <a:buChar char="•"/>
-            </a:pPr>
-            <a:r>
-              <a:rPr lang="en-US" b="0" dirty="0"/>
-              <a:t>Quality check taken care</a:t>
-            </a:r>
-          </a:p>
-          <a:p>
-            <a:pPr marL="457200" indent="-457200">
-              <a:buFont typeface="Arial" panose="020B0604020202020204" pitchFamily="34" charset="0"/>
-              <a:buChar char="•"/>
-            </a:pPr>
-            <a:r>
-              <a:rPr lang="en-US" b="0" dirty="0">
-                <a:effectLst/>
-              </a:rPr>
-              <a:t>All the variables in the EPW filled with measured or modeled data</a:t>
-            </a:r>
-          </a:p>
-          <a:p>
-            <a:pPr marL="457200" indent="-457200">
-              <a:buFont typeface="Arial" panose="020B0604020202020204" pitchFamily="34" charset="0"/>
-              <a:buChar char="•"/>
-            </a:pPr>
-            <a:r>
-              <a:rPr lang="en-US" b="0" dirty="0"/>
-              <a:t>Data available for the last completed year</a:t>
-            </a:r>
-          </a:p>
-          <a:p>
-            <a:pPr marL="457200" indent="-457200">
-              <a:buFont typeface="Arial" panose="020B0604020202020204" pitchFamily="34" charset="0"/>
-              <a:buChar char="•"/>
-            </a:pPr>
-            <a:r>
-              <a:rPr lang="en-US" b="0" dirty="0">
-                <a:effectLst/>
-              </a:rPr>
-              <a:t>Data available everywhere</a:t>
-            </a:r>
-          </a:p>
-          <a:p>
-            <a:pPr marL="457200" indent="-457200">
-              <a:buFont typeface="Arial" panose="020B0604020202020204" pitchFamily="34" charset="0"/>
-              <a:buChar char="•"/>
-            </a:pPr>
-            <a:r>
-              <a:rPr lang="en-US" b="0" dirty="0"/>
-              <a:t>2021 design Conditions</a:t>
-            </a:r>
             <a:endParaRPr lang="en-US" b="0" dirty="0">
               <a:effectLst/>
             </a:endParaRPr>
@@ -28893,10 +28555,570 @@
           </a:p>
         </p:txBody>
       </p:sp>
+      <p:pic>
+        <p:nvPicPr>
+          <p:cNvPr id="4" name="Picture 3" descr="A screenshot of a computer&#10;&#10;Description automatically generated">
+            <a:extLst>
+              <a:ext uri="{FF2B5EF4-FFF2-40B4-BE49-F238E27FC236}">
+                <a16:creationId xmlns:a16="http://schemas.microsoft.com/office/drawing/2014/main" id="{80C5E0DC-06C1-45C2-1417-4E39B3D55905}"/>
+              </a:ext>
+            </a:extLst>
+          </p:cNvPr>
+          <p:cNvPicPr>
+            <a:picLocks noChangeAspect="1"/>
+          </p:cNvPicPr>
+          <p:nvPr/>
+        </p:nvPicPr>
+        <p:blipFill>
+          <a:blip r:embed="rId3"/>
+          <a:srcRect t="1163"/>
+          <a:stretch/>
+        </p:blipFill>
+        <p:spPr>
+          <a:xfrm>
+            <a:off x="5674543" y="1561678"/>
+            <a:ext cx="3560857" cy="2902261"/>
+          </a:xfrm>
+          <a:prstGeom prst="rect">
+            <a:avLst/>
+          </a:prstGeom>
+        </p:spPr>
+      </p:pic>
+      <p:sp>
+        <p:nvSpPr>
+          <p:cNvPr id="6" name="TextBox 5">
+            <a:extLst>
+              <a:ext uri="{FF2B5EF4-FFF2-40B4-BE49-F238E27FC236}">
+                <a16:creationId xmlns:a16="http://schemas.microsoft.com/office/drawing/2014/main" id="{414BC100-C2B1-52CF-E9F9-78FF30902AAF}"/>
+              </a:ext>
+            </a:extLst>
+          </p:cNvPr>
+          <p:cNvSpPr txBox="1"/>
+          <p:nvPr/>
+        </p:nvSpPr>
+        <p:spPr>
+          <a:xfrm>
+            <a:off x="546476" y="1450054"/>
+            <a:ext cx="1525803" cy="1477328"/>
+          </a:xfrm>
+          <a:prstGeom prst="rect">
+            <a:avLst/>
+          </a:prstGeom>
+          <a:noFill/>
+          <a:ln>
+            <a:solidFill>
+              <a:schemeClr val="accent1"/>
+            </a:solidFill>
+          </a:ln>
+        </p:spPr>
+        <p:txBody>
+          <a:bodyPr wrap="square" rtlCol="0">
+            <a:spAutoFit/>
+          </a:bodyPr>
+          <a:lstStyle/>
+          <a:p>
+            <a:r>
+              <a:rPr lang="en-US" dirty="0"/>
+              <a:t>Input:</a:t>
+            </a:r>
+          </a:p>
+          <a:p>
+            <a:pPr marL="285750" indent="-285750">
+              <a:buFont typeface="Arial" panose="020B0604020202020204" pitchFamily="34" charset="0"/>
+              <a:buChar char="•"/>
+            </a:pPr>
+            <a:r>
+              <a:rPr lang="en-US" dirty="0"/>
+              <a:t>Latitude</a:t>
+            </a:r>
+          </a:p>
+          <a:p>
+            <a:pPr marL="285750" indent="-285750">
+              <a:buFont typeface="Arial" panose="020B0604020202020204" pitchFamily="34" charset="0"/>
+              <a:buChar char="•"/>
+            </a:pPr>
+            <a:r>
+              <a:rPr lang="en-US" dirty="0"/>
+              <a:t>Longitude</a:t>
+            </a:r>
+          </a:p>
+          <a:p>
+            <a:pPr marL="285750" indent="-285750">
+              <a:buFont typeface="Arial" panose="020B0604020202020204" pitchFamily="34" charset="0"/>
+              <a:buChar char="•"/>
+            </a:pPr>
+            <a:r>
+              <a:rPr lang="en-US" dirty="0"/>
+              <a:t>Year</a:t>
+            </a:r>
+          </a:p>
+          <a:p>
+            <a:pPr marL="285750" indent="-285750">
+              <a:buFont typeface="Arial" panose="020B0604020202020204" pitchFamily="34" charset="0"/>
+              <a:buChar char="•"/>
+            </a:pPr>
+            <a:r>
+              <a:rPr lang="en-US" dirty="0"/>
+              <a:t>Name</a:t>
+            </a:r>
+          </a:p>
+        </p:txBody>
+      </p:sp>
+      <p:cxnSp>
+        <p:nvCxnSpPr>
+          <p:cNvPr id="8" name="Straight Arrow Connector 7">
+            <a:extLst>
+              <a:ext uri="{FF2B5EF4-FFF2-40B4-BE49-F238E27FC236}">
+                <a16:creationId xmlns:a16="http://schemas.microsoft.com/office/drawing/2014/main" id="{2FED1DBD-882C-B984-2BED-473DFE4C6ABD}"/>
+              </a:ext>
+            </a:extLst>
+          </p:cNvPr>
+          <p:cNvCxnSpPr>
+            <a:cxnSpLocks/>
+            <a:stCxn id="6" idx="3"/>
+            <a:endCxn id="13" idx="1"/>
+          </p:cNvCxnSpPr>
+          <p:nvPr/>
+        </p:nvCxnSpPr>
+        <p:spPr>
+          <a:xfrm flipV="1">
+            <a:off x="2072279" y="1579824"/>
+            <a:ext cx="555496" cy="608894"/>
+          </a:xfrm>
+          <a:prstGeom prst="straightConnector1">
+            <a:avLst/>
+          </a:prstGeom>
+          <a:ln>
+            <a:tailEnd type="triangle"/>
+          </a:ln>
+        </p:spPr>
+        <p:style>
+          <a:lnRef idx="2">
+            <a:schemeClr val="accent1"/>
+          </a:lnRef>
+          <a:fillRef idx="0">
+            <a:schemeClr val="accent1"/>
+          </a:fillRef>
+          <a:effectRef idx="1">
+            <a:schemeClr val="accent1"/>
+          </a:effectRef>
+          <a:fontRef idx="minor">
+            <a:schemeClr val="tx1"/>
+          </a:fontRef>
+        </p:style>
+      </p:cxnSp>
+      <p:sp>
+        <p:nvSpPr>
+          <p:cNvPr id="9" name="TextBox 8">
+            <a:extLst>
+              <a:ext uri="{FF2B5EF4-FFF2-40B4-BE49-F238E27FC236}">
+                <a16:creationId xmlns:a16="http://schemas.microsoft.com/office/drawing/2014/main" id="{A9682608-3A0F-E7DD-2690-23E32ECE04A6}"/>
+              </a:ext>
+            </a:extLst>
+          </p:cNvPr>
+          <p:cNvSpPr txBox="1"/>
+          <p:nvPr/>
+        </p:nvSpPr>
+        <p:spPr>
+          <a:xfrm>
+            <a:off x="2627774" y="3419678"/>
+            <a:ext cx="2927157" cy="369332"/>
+          </a:xfrm>
+          <a:prstGeom prst="rect">
+            <a:avLst/>
+          </a:prstGeom>
+          <a:noFill/>
+          <a:ln>
+            <a:solidFill>
+              <a:schemeClr val="accent1"/>
+            </a:solidFill>
+          </a:ln>
+        </p:spPr>
+        <p:txBody>
+          <a:bodyPr wrap="square" rtlCol="0">
+            <a:spAutoFit/>
+          </a:bodyPr>
+          <a:lstStyle/>
+          <a:p>
+            <a:r>
+              <a:rPr lang="en-US" dirty="0"/>
+              <a:t>3) Splice the two </a:t>
+            </a:r>
+            <a:r>
+              <a:rPr lang="en-US" dirty="0" err="1"/>
+              <a:t>daframes</a:t>
+            </a:r>
+            <a:endParaRPr lang="en-US" dirty="0"/>
+          </a:p>
+        </p:txBody>
+      </p:sp>
+      <p:sp>
+        <p:nvSpPr>
+          <p:cNvPr id="13" name="TextBox 12">
+            <a:extLst>
+              <a:ext uri="{FF2B5EF4-FFF2-40B4-BE49-F238E27FC236}">
+                <a16:creationId xmlns:a16="http://schemas.microsoft.com/office/drawing/2014/main" id="{97BFDEDC-A081-82E4-77FC-1B8DCE2B3B85}"/>
+              </a:ext>
+            </a:extLst>
+          </p:cNvPr>
+          <p:cNvSpPr txBox="1"/>
+          <p:nvPr/>
+        </p:nvSpPr>
+        <p:spPr>
+          <a:xfrm>
+            <a:off x="2627775" y="1118159"/>
+            <a:ext cx="2927157" cy="923330"/>
+          </a:xfrm>
+          <a:prstGeom prst="rect">
+            <a:avLst/>
+          </a:prstGeom>
+          <a:noFill/>
+          <a:ln>
+            <a:solidFill>
+              <a:schemeClr val="accent1"/>
+            </a:solidFill>
+          </a:ln>
+        </p:spPr>
+        <p:txBody>
+          <a:bodyPr wrap="square" rtlCol="0">
+            <a:spAutoFit/>
+          </a:bodyPr>
+          <a:lstStyle/>
+          <a:p>
+            <a:r>
+              <a:rPr lang="en-US" dirty="0"/>
+              <a:t>1) Find the closest </a:t>
+            </a:r>
+            <a:r>
+              <a:rPr lang="en-US" dirty="0" err="1"/>
+              <a:t>Meteostat</a:t>
+            </a:r>
+            <a:endParaRPr lang="en-US" dirty="0"/>
+          </a:p>
+          <a:p>
+            <a:r>
+              <a:rPr lang="en-US" dirty="0"/>
+              <a:t>location with less than 3h gap within 100mi.</a:t>
+            </a:r>
+          </a:p>
+        </p:txBody>
+      </p:sp>
+      <p:cxnSp>
+        <p:nvCxnSpPr>
+          <p:cNvPr id="17" name="Straight Arrow Connector 16">
+            <a:extLst>
+              <a:ext uri="{FF2B5EF4-FFF2-40B4-BE49-F238E27FC236}">
+                <a16:creationId xmlns:a16="http://schemas.microsoft.com/office/drawing/2014/main" id="{CEA27677-515E-BE8E-B7DB-31FAEBD04889}"/>
+              </a:ext>
+            </a:extLst>
+          </p:cNvPr>
+          <p:cNvCxnSpPr>
+            <a:cxnSpLocks/>
+            <a:stCxn id="13" idx="2"/>
+            <a:endCxn id="21" idx="0"/>
+          </p:cNvCxnSpPr>
+          <p:nvPr/>
+        </p:nvCxnSpPr>
+        <p:spPr>
+          <a:xfrm flipH="1">
+            <a:off x="4091353" y="2041489"/>
+            <a:ext cx="1" cy="222753"/>
+          </a:xfrm>
+          <a:prstGeom prst="straightConnector1">
+            <a:avLst/>
+          </a:prstGeom>
+          <a:ln>
+            <a:tailEnd type="triangle"/>
+          </a:ln>
+        </p:spPr>
+        <p:style>
+          <a:lnRef idx="2">
+            <a:schemeClr val="accent1"/>
+          </a:lnRef>
+          <a:fillRef idx="0">
+            <a:schemeClr val="accent1"/>
+          </a:fillRef>
+          <a:effectRef idx="1">
+            <a:schemeClr val="accent1"/>
+          </a:effectRef>
+          <a:fontRef idx="minor">
+            <a:schemeClr val="tx1"/>
+          </a:fontRef>
+        </p:style>
+      </p:cxnSp>
+      <p:sp>
+        <p:nvSpPr>
+          <p:cNvPr id="21" name="TextBox 20">
+            <a:extLst>
+              <a:ext uri="{FF2B5EF4-FFF2-40B4-BE49-F238E27FC236}">
+                <a16:creationId xmlns:a16="http://schemas.microsoft.com/office/drawing/2014/main" id="{CB796CDF-F4AD-5038-6D99-32324E41A74F}"/>
+              </a:ext>
+            </a:extLst>
+          </p:cNvPr>
+          <p:cNvSpPr txBox="1"/>
+          <p:nvPr/>
+        </p:nvSpPr>
+        <p:spPr>
+          <a:xfrm>
+            <a:off x="2627774" y="2264242"/>
+            <a:ext cx="2927157" cy="923330"/>
+          </a:xfrm>
+          <a:prstGeom prst="rect">
+            <a:avLst/>
+          </a:prstGeom>
+          <a:noFill/>
+          <a:ln>
+            <a:solidFill>
+              <a:schemeClr val="accent1"/>
+            </a:solidFill>
+          </a:ln>
+        </p:spPr>
+        <p:txBody>
+          <a:bodyPr wrap="square" rtlCol="0">
+            <a:spAutoFit/>
+          </a:bodyPr>
+          <a:lstStyle/>
+          <a:p>
+            <a:r>
+              <a:rPr lang="en-US" dirty="0"/>
+              <a:t>2) Gather the EPW for the selected station coordinates from MERRA2</a:t>
+            </a:r>
+          </a:p>
+        </p:txBody>
+      </p:sp>
+      <p:cxnSp>
+        <p:nvCxnSpPr>
+          <p:cNvPr id="27" name="Straight Arrow Connector 26">
+            <a:extLst>
+              <a:ext uri="{FF2B5EF4-FFF2-40B4-BE49-F238E27FC236}">
+                <a16:creationId xmlns:a16="http://schemas.microsoft.com/office/drawing/2014/main" id="{6BE4CF5F-0FA6-64E6-4083-E7748A985F11}"/>
+              </a:ext>
+            </a:extLst>
+          </p:cNvPr>
+          <p:cNvCxnSpPr>
+            <a:cxnSpLocks/>
+            <a:stCxn id="21" idx="2"/>
+            <a:endCxn id="9" idx="0"/>
+          </p:cNvCxnSpPr>
+          <p:nvPr/>
+        </p:nvCxnSpPr>
+        <p:spPr>
+          <a:xfrm>
+            <a:off x="4091353" y="3187572"/>
+            <a:ext cx="0" cy="232106"/>
+          </a:xfrm>
+          <a:prstGeom prst="straightConnector1">
+            <a:avLst/>
+          </a:prstGeom>
+          <a:ln>
+            <a:tailEnd type="triangle"/>
+          </a:ln>
+        </p:spPr>
+        <p:style>
+          <a:lnRef idx="2">
+            <a:schemeClr val="accent1"/>
+          </a:lnRef>
+          <a:fillRef idx="0">
+            <a:schemeClr val="accent1"/>
+          </a:fillRef>
+          <a:effectRef idx="1">
+            <a:schemeClr val="accent1"/>
+          </a:effectRef>
+          <a:fontRef idx="minor">
+            <a:schemeClr val="tx1"/>
+          </a:fontRef>
+        </p:style>
+      </p:cxnSp>
+      <p:sp>
+        <p:nvSpPr>
+          <p:cNvPr id="36" name="TextBox 35">
+            <a:extLst>
+              <a:ext uri="{FF2B5EF4-FFF2-40B4-BE49-F238E27FC236}">
+                <a16:creationId xmlns:a16="http://schemas.microsoft.com/office/drawing/2014/main" id="{C2AE773D-AAB8-7AF0-B078-97127AF3036A}"/>
+              </a:ext>
+            </a:extLst>
+          </p:cNvPr>
+          <p:cNvSpPr txBox="1"/>
+          <p:nvPr/>
+        </p:nvSpPr>
+        <p:spPr>
+          <a:xfrm>
+            <a:off x="2627774" y="4021116"/>
+            <a:ext cx="2927157" cy="923330"/>
+          </a:xfrm>
+          <a:prstGeom prst="rect">
+            <a:avLst/>
+          </a:prstGeom>
+          <a:noFill/>
+          <a:ln>
+            <a:solidFill>
+              <a:schemeClr val="accent1"/>
+            </a:solidFill>
+          </a:ln>
+        </p:spPr>
+        <p:txBody>
+          <a:bodyPr wrap="square" rtlCol="0">
+            <a:spAutoFit/>
+          </a:bodyPr>
+          <a:lstStyle/>
+          <a:p>
+            <a:r>
+              <a:rPr lang="en-US" dirty="0"/>
+              <a:t>4) Insert the header with design conditions and other customized information</a:t>
+            </a:r>
+          </a:p>
+        </p:txBody>
+      </p:sp>
+      <p:cxnSp>
+        <p:nvCxnSpPr>
+          <p:cNvPr id="37" name="Straight Arrow Connector 36">
+            <a:extLst>
+              <a:ext uri="{FF2B5EF4-FFF2-40B4-BE49-F238E27FC236}">
+                <a16:creationId xmlns:a16="http://schemas.microsoft.com/office/drawing/2014/main" id="{951CE1F1-B70C-346D-A828-E37BA3E8B00E}"/>
+              </a:ext>
+            </a:extLst>
+          </p:cNvPr>
+          <p:cNvCxnSpPr>
+            <a:cxnSpLocks/>
+            <a:stCxn id="9" idx="2"/>
+            <a:endCxn id="36" idx="0"/>
+          </p:cNvCxnSpPr>
+          <p:nvPr/>
+        </p:nvCxnSpPr>
+        <p:spPr>
+          <a:xfrm>
+            <a:off x="4091353" y="3789010"/>
+            <a:ext cx="0" cy="232106"/>
+          </a:xfrm>
+          <a:prstGeom prst="straightConnector1">
+            <a:avLst/>
+          </a:prstGeom>
+          <a:ln>
+            <a:tailEnd type="triangle"/>
+          </a:ln>
+        </p:spPr>
+        <p:style>
+          <a:lnRef idx="2">
+            <a:schemeClr val="accent1"/>
+          </a:lnRef>
+          <a:fillRef idx="0">
+            <a:schemeClr val="accent1"/>
+          </a:fillRef>
+          <a:effectRef idx="1">
+            <a:schemeClr val="accent1"/>
+          </a:effectRef>
+          <a:fontRef idx="minor">
+            <a:schemeClr val="tx1"/>
+          </a:fontRef>
+        </p:style>
+      </p:cxnSp>
+      <p:sp>
+        <p:nvSpPr>
+          <p:cNvPr id="44" name="TextBox 43">
+            <a:extLst>
+              <a:ext uri="{FF2B5EF4-FFF2-40B4-BE49-F238E27FC236}">
+                <a16:creationId xmlns:a16="http://schemas.microsoft.com/office/drawing/2014/main" id="{1AFCB497-6BC0-64C7-4F86-7B33C7D7A78A}"/>
+              </a:ext>
+            </a:extLst>
+          </p:cNvPr>
+          <p:cNvSpPr txBox="1"/>
+          <p:nvPr/>
+        </p:nvSpPr>
+        <p:spPr>
+          <a:xfrm>
+            <a:off x="248892" y="3419678"/>
+            <a:ext cx="1942420" cy="1477328"/>
+          </a:xfrm>
+          <a:prstGeom prst="rect">
+            <a:avLst/>
+          </a:prstGeom>
+          <a:noFill/>
+          <a:ln>
+            <a:solidFill>
+              <a:schemeClr val="accent1"/>
+            </a:solidFill>
+          </a:ln>
+        </p:spPr>
+        <p:txBody>
+          <a:bodyPr wrap="square" rtlCol="0">
+            <a:spAutoFit/>
+          </a:bodyPr>
+          <a:lstStyle/>
+          <a:p>
+            <a:r>
+              <a:rPr lang="en-US" dirty="0"/>
+              <a:t>Save EPW file and print out:</a:t>
+            </a:r>
+          </a:p>
+          <a:p>
+            <a:pPr marL="285750" indent="-285750">
+              <a:buFont typeface="Arial" panose="020B0604020202020204" pitchFamily="34" charset="0"/>
+              <a:buChar char="•"/>
+            </a:pPr>
+            <a:r>
+              <a:rPr lang="en-US" dirty="0"/>
+              <a:t>Station distance</a:t>
+            </a:r>
+          </a:p>
+          <a:p>
+            <a:pPr marL="285750" indent="-285750">
+              <a:buFont typeface="Arial" panose="020B0604020202020204" pitchFamily="34" charset="0"/>
+              <a:buChar char="•"/>
+            </a:pPr>
+            <a:r>
+              <a:rPr lang="en-US" dirty="0"/>
+              <a:t>HDD/CDD</a:t>
+            </a:r>
+          </a:p>
+        </p:txBody>
+      </p:sp>
+      <p:cxnSp>
+        <p:nvCxnSpPr>
+          <p:cNvPr id="45" name="Straight Arrow Connector 44">
+            <a:extLst>
+              <a:ext uri="{FF2B5EF4-FFF2-40B4-BE49-F238E27FC236}">
+                <a16:creationId xmlns:a16="http://schemas.microsoft.com/office/drawing/2014/main" id="{713658AD-A818-BFC6-3555-FB7E43106EE5}"/>
+              </a:ext>
+            </a:extLst>
+          </p:cNvPr>
+          <p:cNvCxnSpPr>
+            <a:cxnSpLocks/>
+            <a:stCxn id="36" idx="1"/>
+            <a:endCxn id="44" idx="3"/>
+          </p:cNvCxnSpPr>
+          <p:nvPr/>
+        </p:nvCxnSpPr>
+        <p:spPr>
+          <a:xfrm flipH="1" flipV="1">
+            <a:off x="2191312" y="4158342"/>
+            <a:ext cx="436462" cy="324439"/>
+          </a:xfrm>
+          <a:prstGeom prst="straightConnector1">
+            <a:avLst/>
+          </a:prstGeom>
+          <a:ln>
+            <a:tailEnd type="triangle"/>
+          </a:ln>
+        </p:spPr>
+        <p:style>
+          <a:lnRef idx="2">
+            <a:schemeClr val="accent1"/>
+          </a:lnRef>
+          <a:fillRef idx="0">
+            <a:schemeClr val="accent1"/>
+          </a:fillRef>
+          <a:effectRef idx="1">
+            <a:schemeClr val="accent1"/>
+          </a:effectRef>
+          <a:fontRef idx="minor">
+            <a:schemeClr val="tx1"/>
+          </a:fontRef>
+        </p:style>
+      </p:cxnSp>
     </p:spTree>
     <p:extLst>
       <p:ext uri="{BB962C8B-B14F-4D97-AF65-F5344CB8AC3E}">
-        <p14:creationId xmlns:p14="http://schemas.microsoft.com/office/powerpoint/2010/main" val="1214939520"/>
+        <p14:creationId xmlns:p14="http://schemas.microsoft.com/office/powerpoint/2010/main" val="3518891770"/>
       </p:ext>
     </p:extLst>
   </p:cSld>
@@ -28946,7 +29168,7 @@
           <a:p>
             <a:r>
               <a:rPr lang="en-US" dirty="0"/>
-              <a:t>Future editions/ideas</a:t>
+              <a:t>To summarize:</a:t>
             </a:r>
           </a:p>
         </p:txBody>
@@ -28983,6 +29205,66 @@
               <a:buFont typeface="Arial" panose="020B0604020202020204" pitchFamily="34" charset="0"/>
               <a:buChar char="•"/>
             </a:pPr>
+            <a:r>
+              <a:rPr lang="en-US" b="0" dirty="0">
+                <a:effectLst/>
+              </a:rPr>
+              <a:t>More locations</a:t>
+            </a:r>
+          </a:p>
+          <a:p>
+            <a:pPr marL="457200" indent="-457200">
+              <a:buFont typeface="Arial" panose="020B0604020202020204" pitchFamily="34" charset="0"/>
+              <a:buChar char="•"/>
+            </a:pPr>
+            <a:r>
+              <a:rPr lang="en-US" b="0" dirty="0"/>
+              <a:t>Quality check taken care</a:t>
+            </a:r>
+          </a:p>
+          <a:p>
+            <a:pPr marL="457200" indent="-457200">
+              <a:buFont typeface="Arial" panose="020B0604020202020204" pitchFamily="34" charset="0"/>
+              <a:buChar char="•"/>
+            </a:pPr>
+            <a:r>
+              <a:rPr lang="en-US" b="0" dirty="0">
+                <a:effectLst/>
+              </a:rPr>
+              <a:t>All the variables in the EPW filled with measured or modeled data</a:t>
+            </a:r>
+          </a:p>
+          <a:p>
+            <a:pPr marL="457200" indent="-457200">
+              <a:buFont typeface="Arial" panose="020B0604020202020204" pitchFamily="34" charset="0"/>
+              <a:buChar char="•"/>
+            </a:pPr>
+            <a:r>
+              <a:rPr lang="en-US" b="0" dirty="0"/>
+              <a:t>Data available for the last completed year</a:t>
+            </a:r>
+          </a:p>
+          <a:p>
+            <a:pPr marL="457200" indent="-457200">
+              <a:buFont typeface="Arial" panose="020B0604020202020204" pitchFamily="34" charset="0"/>
+              <a:buChar char="•"/>
+            </a:pPr>
+            <a:r>
+              <a:rPr lang="en-US" b="0" dirty="0">
+                <a:effectLst/>
+              </a:rPr>
+              <a:t>Data available everywhere</a:t>
+            </a:r>
+          </a:p>
+          <a:p>
+            <a:pPr marL="457200" indent="-457200">
+              <a:buFont typeface="Arial" panose="020B0604020202020204" pitchFamily="34" charset="0"/>
+              <a:buChar char="•"/>
+            </a:pPr>
+            <a:r>
+              <a:rPr lang="en-US" b="0" dirty="0"/>
+              <a:t>2021 design Conditions</a:t>
+            </a:r>
             <a:endParaRPr lang="en-US" b="0" dirty="0">
               <a:effectLst/>
             </a:endParaRPr>
@@ -29038,123 +29320,10 @@
           </a:p>
         </p:txBody>
       </p:sp>
-      <p:sp>
-        <p:nvSpPr>
-          <p:cNvPr id="4" name="TextBox 3">
-            <a:extLst>
-              <a:ext uri="{FF2B5EF4-FFF2-40B4-BE49-F238E27FC236}">
-                <a16:creationId xmlns:a16="http://schemas.microsoft.com/office/drawing/2014/main" id="{6B53BE6D-0D8C-1ABB-0B37-63088F68B435}"/>
-              </a:ext>
-            </a:extLst>
-          </p:cNvPr>
-          <p:cNvSpPr txBox="1"/>
-          <p:nvPr/>
-        </p:nvSpPr>
-        <p:spPr>
-          <a:xfrm>
-            <a:off x="670921" y="1163290"/>
-            <a:ext cx="6579351" cy="2585323"/>
-          </a:xfrm>
-          <a:prstGeom prst="rect">
-            <a:avLst/>
-          </a:prstGeom>
-          <a:noFill/>
-        </p:spPr>
-        <p:txBody>
-          <a:bodyPr wrap="square" rtlCol="0">
-            <a:spAutoFit/>
-          </a:bodyPr>
-          <a:lstStyle/>
-          <a:p>
-            <a:pPr marL="285750" indent="-285750">
-              <a:buFont typeface="Arial" panose="020B0604020202020204" pitchFamily="34" charset="0"/>
-              <a:buChar char="•"/>
-            </a:pPr>
-            <a:r>
-              <a:rPr lang="en-US" dirty="0"/>
-              <a:t>Integrate TMY/</a:t>
-            </a:r>
-            <a:r>
-              <a:rPr lang="en-US" dirty="0" err="1"/>
-              <a:t>GaTMY</a:t>
-            </a:r>
-            <a:endParaRPr lang="en-US" dirty="0"/>
-          </a:p>
-          <a:p>
-            <a:pPr marL="285750" indent="-285750">
-              <a:buFont typeface="Arial" panose="020B0604020202020204" pitchFamily="34" charset="0"/>
-              <a:buChar char="•"/>
-            </a:pPr>
-            <a:r>
-              <a:rPr lang="en-US" dirty="0"/>
-              <a:t>Provide the option to use ERA5 vs MERRA2</a:t>
-            </a:r>
-          </a:p>
-          <a:p>
-            <a:pPr marL="285750" indent="-285750">
-              <a:buFont typeface="Arial" panose="020B0604020202020204" pitchFamily="34" charset="0"/>
-              <a:buChar char="•"/>
-            </a:pPr>
-            <a:r>
-              <a:rPr lang="en-US" dirty="0"/>
-              <a:t>Use MERRA2 directly</a:t>
-            </a:r>
-          </a:p>
-          <a:p>
-            <a:pPr marL="285750" indent="-285750">
-              <a:buFont typeface="Arial" panose="020B0604020202020204" pitchFamily="34" charset="0"/>
-              <a:buChar char="•"/>
-            </a:pPr>
-            <a:r>
-              <a:rPr lang="en-US" dirty="0"/>
-              <a:t>Plot data or provide statistics</a:t>
-            </a:r>
-          </a:p>
-          <a:p>
-            <a:pPr marL="285750" indent="-285750">
-              <a:buFont typeface="Arial" panose="020B0604020202020204" pitchFamily="34" charset="0"/>
-              <a:buChar char="•"/>
-            </a:pPr>
-            <a:r>
-              <a:rPr lang="en-US" dirty="0"/>
-              <a:t>Create STAT file and/or DDYs</a:t>
-            </a:r>
-          </a:p>
-          <a:p>
-            <a:pPr marL="285750" indent="-285750">
-              <a:buFont typeface="Arial" panose="020B0604020202020204" pitchFamily="34" charset="0"/>
-              <a:buChar char="•"/>
-            </a:pPr>
-            <a:r>
-              <a:rPr lang="en-US" dirty="0"/>
-              <a:t>Allow use of 2013 design conditions</a:t>
-            </a:r>
-          </a:p>
-          <a:p>
-            <a:pPr marL="285750" indent="-285750">
-              <a:buFont typeface="Arial" panose="020B0604020202020204" pitchFamily="34" charset="0"/>
-              <a:buChar char="•"/>
-            </a:pPr>
-            <a:r>
-              <a:rPr lang="en-US" dirty="0"/>
-              <a:t>Let the user search by FIP code or ZIP code or something else</a:t>
-            </a:r>
-          </a:p>
-          <a:p>
-            <a:br>
-              <a:rPr lang="en-US" dirty="0"/>
-            </a:br>
-            <a:r>
-              <a:rPr lang="en-US" dirty="0"/>
-              <a:t>Anything else?</a:t>
-            </a:r>
-          </a:p>
-        </p:txBody>
-      </p:sp>
     </p:spTree>
     <p:extLst>
       <p:ext uri="{BB962C8B-B14F-4D97-AF65-F5344CB8AC3E}">
-        <p14:creationId xmlns:p14="http://schemas.microsoft.com/office/powerpoint/2010/main" val="702805414"/>
+        <p14:creationId xmlns:p14="http://schemas.microsoft.com/office/powerpoint/2010/main" val="1214939520"/>
       </p:ext>
     </p:extLst>
   </p:cSld>
